--- a/docs/마음이음_사용설명서.pptx
+++ b/docs/마음이음_사용설명서.pptx
@@ -3203,7 +3203,7 @@
                 <a:ea typeface="맑은 고딕" pitchFamily="34" charset="-122"/>
                 <a:cs typeface="맑은 고딕" pitchFamily="34" charset="-120"/>
               </a:rPr>
-              <a:t>음성이 잘 안 되면 텍스트로 바꿔서 대화하세요.</a:t>
+              <a:t>음성이 잘 안 되면 아래 [글씨 대화로 전환]을 눌러 글자로 대화하세요.</a:t>
             </a:r>
             <a:endParaRPr lang="en-US" sz="1900" dirty="0"/>
           </a:p>
@@ -3307,7 +3307,7 @@
                 <a:ea typeface="맑은 고딕" pitchFamily="34" charset="-122"/>
                 <a:cs typeface="맑은 고딕" pitchFamily="34" charset="-120"/>
               </a:rPr>
-              <a:t>AI 이름·부르는 호칭은 마이페이지에서 바꿀 수 있어요.</a:t>
+              <a:t>AI 이름·부르는 호칭은 마이페이지에서 바꿀 수 있어요. 바꾼 이름으로 부르면 돼요.</a:t>
             </a:r>
             <a:endParaRPr lang="en-US" sz="1900" dirty="0"/>
           </a:p>
@@ -7303,8 +7303,8 @@
         </p:nvSpPr>
         <p:spPr>
           <a:xfrm>
-            <a:off x="2514600" y="2331720"/>
-            <a:ext cx="3200400" cy="640080"/>
+            <a:off x="2514600" y="2240280"/>
+            <a:ext cx="3291840" cy="640080"/>
           </a:xfrm>
           <a:prstGeom prst="rect">
             <a:avLst/>
@@ -7328,7 +7328,7 @@
                 <a:ea typeface="맑은 고딕" pitchFamily="34" charset="-122"/>
                 <a:cs typeface="맑은 고딕" pitchFamily="34" charset="-120"/>
               </a:rPr>
-              <a:t>음성으로 대화</a:t>
+              <a:t>부르면 시작돼요</a:t>
             </a:r>
             <a:endParaRPr lang="en-US" sz="2300" dirty="0"/>
           </a:p>
@@ -7342,8 +7342,8 @@
         </p:nvSpPr>
         <p:spPr>
           <a:xfrm>
-            <a:off x="2514600" y="2971800"/>
-            <a:ext cx="3246120" cy="1554480"/>
+            <a:off x="2514600" y="2834640"/>
+            <a:ext cx="3291840" cy="1783080"/>
           </a:xfrm>
           <a:prstGeom prst="rect">
             <a:avLst/>
@@ -7362,7 +7362,7 @@
               <a:buNone/>
             </a:pPr>
             <a:r>
-              <a:rPr lang="en-US" sz="1600" dirty="0">
+              <a:rPr lang="en-US" sz="1500" dirty="0">
                 <a:solidFill>
                   <a:srgbClr val="5E7A78"/>
                 </a:solidFill>
@@ -7370,9 +7370,9 @@
                 <a:ea typeface="맑은 고딕" pitchFamily="34" charset="-122"/>
                 <a:cs typeface="맑은 고딕" pitchFamily="34" charset="-120"/>
               </a:rPr>
-              <a:t>[음성으로 대화하기]를 누르고</a:t>
-            </a:r>
-            <a:endParaRPr lang="en-US" sz="1600" dirty="0"/>
+              <a:t>화면을 열고 AI 이름을</a:t>
+            </a:r>
+            <a:endParaRPr lang="en-US" sz="1500" dirty="0"/>
           </a:p>
           <a:p>
             <a:pPr indent="0" marL="0">
@@ -7382,7 +7382,7 @@
               <a:buNone/>
             </a:pPr>
             <a:r>
-              <a:rPr lang="en-US" sz="1600" dirty="0">
+              <a:rPr lang="en-US" sz="1500" dirty="0">
                 <a:solidFill>
                   <a:srgbClr val="5E7A78"/>
                 </a:solidFill>
@@ -7390,9 +7390,9 @@
                 <a:ea typeface="맑은 고딕" pitchFamily="34" charset="-122"/>
                 <a:cs typeface="맑은 고딕" pitchFamily="34" charset="-120"/>
               </a:rPr>
-              <a:t>“마음아” 하고 부르면</a:t>
-            </a:r>
-            <a:endParaRPr lang="en-US" sz="1600" dirty="0"/>
+              <a:t>부르면 바로 대화가 시작돼요.</a:t>
+            </a:r>
+            <a:endParaRPr lang="en-US" sz="1500" dirty="0"/>
           </a:p>
           <a:p>
             <a:pPr indent="0" marL="0">
@@ -7402,7 +7402,7 @@
               <a:buNone/>
             </a:pPr>
             <a:r>
-              <a:rPr lang="en-US" sz="1600" dirty="0">
+              <a:rPr lang="en-US" sz="1500" dirty="0">
                 <a:solidFill>
                   <a:srgbClr val="5E7A78"/>
                 </a:solidFill>
@@ -7410,9 +7410,29 @@
                 <a:ea typeface="맑은 고딕" pitchFamily="34" charset="-122"/>
                 <a:cs typeface="맑은 고딕" pitchFamily="34" charset="-120"/>
               </a:rPr>
-              <a:t>AI가 귀 기울여 들어요.</a:t>
-            </a:r>
-            <a:endParaRPr lang="en-US" sz="1600" dirty="0"/>
+              <a:t>(예: "민지야" 또는 "마음아")</a:t>
+            </a:r>
+            <a:endParaRPr lang="en-US" sz="1500" dirty="0"/>
+          </a:p>
+          <a:p>
+            <a:pPr indent="0" marL="0">
+              <a:lnSpc>
+                <a:spcPct val="115000"/>
+              </a:lnSpc>
+              <a:buNone/>
+            </a:pPr>
+            <a:r>
+              <a:rPr lang="en-US" sz="1500" dirty="0">
+                <a:solidFill>
+                  <a:srgbClr val="5E7A78"/>
+                </a:solidFill>
+                <a:latin typeface="맑은 고딕" pitchFamily="34" charset="0"/>
+                <a:ea typeface="맑은 고딕" pitchFamily="34" charset="-122"/>
+                <a:cs typeface="맑은 고딕" pitchFamily="34" charset="-120"/>
+              </a:rPr>
+              <a:t>버튼을 누를 필요 없어요.</a:t>
+            </a:r>
+            <a:endParaRPr lang="en-US" sz="1500" dirty="0"/>
           </a:p>
         </p:txBody>
       </p:sp>
@@ -7509,8 +7529,8 @@
         </p:nvSpPr>
         <p:spPr>
           <a:xfrm>
-            <a:off x="8092440" y="2331720"/>
-            <a:ext cx="3200400" cy="640080"/>
+            <a:off x="8092440" y="2240280"/>
+            <a:ext cx="3291840" cy="640080"/>
           </a:xfrm>
           <a:prstGeom prst="rect">
             <a:avLst/>
@@ -7548,8 +7568,8 @@
         </p:nvSpPr>
         <p:spPr>
           <a:xfrm>
-            <a:off x="8092440" y="2971800"/>
-            <a:ext cx="3246120" cy="1554480"/>
+            <a:off x="8092440" y="2834640"/>
+            <a:ext cx="3291840" cy="1783080"/>
           </a:xfrm>
           <a:prstGeom prst="rect">
             <a:avLst/>
@@ -7568,7 +7588,7 @@
               <a:buNone/>
             </a:pPr>
             <a:r>
-              <a:rPr lang="en-US" sz="1600" dirty="0">
+              <a:rPr lang="en-US" sz="1500" dirty="0">
                 <a:solidFill>
                   <a:srgbClr val="5E7A78"/>
                 </a:solidFill>
@@ -7576,9 +7596,9 @@
                 <a:ea typeface="맑은 고딕" pitchFamily="34" charset="-122"/>
                 <a:cs typeface="맑은 고딕" pitchFamily="34" charset="-120"/>
               </a:rPr>
-              <a:t>음성이 어려우면</a:t>
-            </a:r>
-            <a:endParaRPr lang="en-US" sz="1600" dirty="0"/>
+              <a:t>말하기 어려우시면</a:t>
+            </a:r>
+            <a:endParaRPr lang="en-US" sz="1500" dirty="0"/>
           </a:p>
           <a:p>
             <a:pPr indent="0" marL="0">
@@ -7588,7 +7608,7 @@
               <a:buNone/>
             </a:pPr>
             <a:r>
-              <a:rPr lang="en-US" sz="1600" dirty="0">
+              <a:rPr lang="en-US" sz="1500" dirty="0">
                 <a:solidFill>
                   <a:srgbClr val="5E7A78"/>
                 </a:solidFill>
@@ -7596,9 +7616,9 @@
                 <a:ea typeface="맑은 고딕" pitchFamily="34" charset="-122"/>
                 <a:cs typeface="맑은 고딕" pitchFamily="34" charset="-120"/>
               </a:rPr>
-              <a:t>[텍스트로 대화하기]로</a:t>
-            </a:r>
-            <a:endParaRPr lang="en-US" sz="1600" dirty="0"/>
+              <a:t>화면 아래 [글씨 대화로 전환]을</a:t>
+            </a:r>
+            <a:endParaRPr lang="en-US" sz="1500" dirty="0"/>
           </a:p>
           <a:p>
             <a:pPr indent="0" marL="0">
@@ -7608,7 +7628,7 @@
               <a:buNone/>
             </a:pPr>
             <a:r>
-              <a:rPr lang="en-US" sz="1600" dirty="0">
+              <a:rPr lang="en-US" sz="1500" dirty="0">
                 <a:solidFill>
                   <a:srgbClr val="5E7A78"/>
                 </a:solidFill>
@@ -7616,9 +7636,9 @@
                 <a:ea typeface="맑은 고딕" pitchFamily="34" charset="-122"/>
                 <a:cs typeface="맑은 고딕" pitchFamily="34" charset="-120"/>
               </a:rPr>
-              <a:t>직접 써서 보낼 수 있어요.</a:t>
-            </a:r>
-            <a:endParaRPr lang="en-US" sz="1600" dirty="0"/>
+              <a:t>눌러 직접 쓸 수 있어요.</a:t>
+            </a:r>
+            <a:endParaRPr lang="en-US" sz="1500" dirty="0"/>
           </a:p>
         </p:txBody>
       </p:sp>
@@ -7684,7 +7704,7 @@
                 <a:ea typeface="맑은 고딕" pitchFamily="34" charset="-122"/>
                 <a:cs typeface="맑은 고딕" pitchFamily="34" charset="-120"/>
               </a:rPr>
-              <a:t>👵💬  AI 동반자(예: 민지)가 손주처럼 먼저 안부를 묻고, 어르신 이야기에 귀 기울여요.</a:t>
+              <a:t>👵💬  잠깐 쉬고 싶으면 "그만" 하고 말씀하세요. 다시 이야기하고 싶으면 이름을 부르면 돼요.</a:t>
             </a:r>
             <a:endParaRPr lang="en-US" sz="1800" dirty="0"/>
           </a:p>
@@ -8798,7 +8818,7 @@
                 <a:ea typeface="맑은 고딕" pitchFamily="34" charset="-122"/>
                 <a:cs typeface="맑은 고딕" pitchFamily="34" charset="-120"/>
               </a:rPr>
-              <a:t>‘전문가·보호자’ 계정으로</a:t>
+              <a:t>'전문가·보호자' 계정으로</a:t>
             </a:r>
             <a:endParaRPr lang="en-US" sz="1600" dirty="0"/>
           </a:p>

--- a/docs/마음이음_사용설명서.pptx
+++ b/docs/마음이음_사용설명서.pptx
@@ -7370,7 +7370,7 @@
                 <a:ea typeface="맑은 고딕" pitchFamily="34" charset="-122"/>
                 <a:cs typeface="맑은 고딕" pitchFamily="34" charset="-120"/>
               </a:rPr>
-              <a:t>화면을 열고 AI 이름을</a:t>
+              <a:t>앱을 열고 AI 이름을</a:t>
             </a:r>
             <a:endParaRPr lang="en-US" sz="1500" dirty="0"/>
           </a:p>

--- a/docs/마음이음_사용설명서.pptx
+++ b/docs/마음이음_사용설명서.pptx
@@ -1875,6 +1875,10 @@
           </a:solidFill>
           <a:ln/>
         </p:spPr>
+        <p:txBody>
+          <a:bodyPr/>
+          <a:p/>
+        </p:txBody>
       </p:sp>
       <p:sp>
         <p:nvSpPr>
@@ -1897,6 +1901,10 @@
           </a:solidFill>
           <a:ln/>
         </p:spPr>
+        <p:txBody>
+          <a:bodyPr/>
+          <a:p/>
+        </p:txBody>
       </p:sp>
       <p:sp>
         <p:nvSpPr>
@@ -2109,6 +2117,10 @@
             </a:outerShdw>
           </a:effectLst>
         </p:spPr>
+        <p:txBody>
+          <a:bodyPr/>
+          <a:p/>
+        </p:txBody>
       </p:sp>
       <p:sp>
         <p:nvSpPr>
@@ -2196,6 +2208,10 @@
           </a:solidFill>
           <a:ln/>
         </p:spPr>
+        <p:txBody>
+          <a:bodyPr/>
+          <a:p/>
+        </p:txBody>
       </p:sp>
       <p:sp>
         <p:nvSpPr>
@@ -2223,6 +2239,10 @@
             </a:outerShdw>
           </a:effectLst>
         </p:spPr>
+        <p:txBody>
+          <a:bodyPr/>
+          <a:p/>
+        </p:txBody>
       </p:sp>
       <p:sp>
         <p:nvSpPr>
@@ -2288,6 +2308,10 @@
             </a:outerShdw>
           </a:effectLst>
         </p:spPr>
+        <p:txBody>
+          <a:bodyPr/>
+          <a:p/>
+        </p:txBody>
       </p:sp>
       <p:sp>
         <p:nvSpPr>
@@ -2308,6 +2332,10 @@
           </a:solidFill>
           <a:ln/>
         </p:spPr>
+        <p:txBody>
+          <a:bodyPr/>
+          <a:p/>
+        </p:txBody>
       </p:sp>
       <p:sp>
         <p:nvSpPr>
@@ -2474,6 +2502,10 @@
             </a:outerShdw>
           </a:effectLst>
         </p:spPr>
+        <p:txBody>
+          <a:bodyPr/>
+          <a:p/>
+        </p:txBody>
       </p:sp>
       <p:sp>
         <p:nvSpPr>
@@ -2494,6 +2526,10 @@
           </a:solidFill>
           <a:ln/>
         </p:spPr>
+        <p:txBody>
+          <a:bodyPr/>
+          <a:p/>
+        </p:txBody>
       </p:sp>
       <p:sp>
         <p:nvSpPr>
@@ -2660,6 +2696,10 @@
             </a:outerShdw>
           </a:effectLst>
         </p:spPr>
+        <p:txBody>
+          <a:bodyPr/>
+          <a:p/>
+        </p:txBody>
       </p:sp>
       <p:sp>
         <p:nvSpPr>
@@ -2680,6 +2720,10 @@
           </a:solidFill>
           <a:ln/>
         </p:spPr>
+        <p:txBody>
+          <a:bodyPr/>
+          <a:p/>
+        </p:txBody>
       </p:sp>
       <p:sp>
         <p:nvSpPr>
@@ -2954,6 +2998,10 @@
             </a:outerShdw>
           </a:effectLst>
         </p:spPr>
+        <p:txBody>
+          <a:bodyPr/>
+          <a:p/>
+        </p:txBody>
       </p:sp>
       <p:sp>
         <p:nvSpPr>
@@ -3041,6 +3089,10 @@
           </a:solidFill>
           <a:ln/>
         </p:spPr>
+        <p:txBody>
+          <a:bodyPr/>
+          <a:p/>
+        </p:txBody>
       </p:sp>
       <p:sp>
         <p:nvSpPr>
@@ -3068,6 +3120,10 @@
             </a:outerShdw>
           </a:effectLst>
         </p:spPr>
+        <p:txBody>
+          <a:bodyPr/>
+          <a:p/>
+        </p:txBody>
       </p:sp>
       <p:sp>
         <p:nvSpPr>
@@ -3133,6 +3189,10 @@
             </a:outerShdw>
           </a:effectLst>
         </p:spPr>
+        <p:txBody>
+          <a:bodyPr/>
+          <a:p/>
+        </p:txBody>
       </p:sp>
       <p:sp>
         <p:nvSpPr>
@@ -3203,7 +3263,7 @@
                 <a:ea typeface="맑은 고딕" pitchFamily="34" charset="-122"/>
                 <a:cs typeface="맑은 고딕" pitchFamily="34" charset="-120"/>
               </a:rPr>
-              <a:t>음성이 잘 안 되면 아래 [글씨 대화로 전환]을 눌러 글자로 대화하세요.</a:t>
+              <a:t>음성이 잘 안 되면 화면 위 [글씨로 대화]를 눌러 글자로 대화하세요.</a:t>
             </a:r>
             <a:endParaRPr lang="en-US" sz="1900" dirty="0"/>
           </a:p>
@@ -3237,6 +3297,10 @@
             </a:outerShdw>
           </a:effectLst>
         </p:spPr>
+        <p:txBody>
+          <a:bodyPr/>
+          <a:p/>
+        </p:txBody>
       </p:sp>
       <p:sp>
         <p:nvSpPr>
@@ -3307,7 +3371,7 @@
                 <a:ea typeface="맑은 고딕" pitchFamily="34" charset="-122"/>
                 <a:cs typeface="맑은 고딕" pitchFamily="34" charset="-120"/>
               </a:rPr>
-              <a:t>AI 이름·부르는 호칭은 마이페이지에서 바꿀 수 있어요. 바꾼 이름으로 부르면 돼요.</a:t>
+              <a:t>AI 이름·부르는 호칭은 마이페이지에서 바꿀 수 있어요.</a:t>
             </a:r>
             <a:endParaRPr lang="en-US" sz="1900" dirty="0"/>
           </a:p>
@@ -3341,6 +3405,10 @@
             </a:outerShdw>
           </a:effectLst>
         </p:spPr>
+        <p:txBody>
+          <a:bodyPr/>
+          <a:p/>
+        </p:txBody>
       </p:sp>
       <p:sp>
         <p:nvSpPr>
@@ -3445,6 +3513,10 @@
             </a:outerShdw>
           </a:effectLst>
         </p:spPr>
+        <p:txBody>
+          <a:bodyPr/>
+          <a:p/>
+        </p:txBody>
       </p:sp>
       <p:sp>
         <p:nvSpPr>
@@ -3652,6 +3724,10 @@
           </a:solidFill>
           <a:ln/>
         </p:spPr>
+        <p:txBody>
+          <a:bodyPr/>
+          <a:p/>
+        </p:txBody>
       </p:sp>
       <p:sp>
         <p:nvSpPr>
@@ -3674,6 +3750,10 @@
           </a:solidFill>
           <a:ln/>
         </p:spPr>
+        <p:txBody>
+          <a:bodyPr/>
+          <a:p/>
+        </p:txBody>
       </p:sp>
       <p:sp>
         <p:nvSpPr>
@@ -3886,6 +3966,10 @@
             </a:outerShdw>
           </a:effectLst>
         </p:spPr>
+        <p:txBody>
+          <a:bodyPr/>
+          <a:p/>
+        </p:txBody>
       </p:sp>
       <p:sp>
         <p:nvSpPr>
@@ -3973,6 +4057,10 @@
           </a:solidFill>
           <a:ln/>
         </p:spPr>
+        <p:txBody>
+          <a:bodyPr/>
+          <a:p/>
+        </p:txBody>
       </p:sp>
       <p:sp>
         <p:nvSpPr>
@@ -4000,6 +4088,10 @@
             </a:outerShdw>
           </a:effectLst>
         </p:spPr>
+        <p:txBody>
+          <a:bodyPr/>
+          <a:p/>
+        </p:txBody>
       </p:sp>
       <p:sp>
         <p:nvSpPr>
@@ -4127,6 +4219,10 @@
             </a:outerShdw>
           </a:effectLst>
         </p:spPr>
+        <p:txBody>
+          <a:bodyPr/>
+          <a:p/>
+        </p:txBody>
       </p:sp>
       <p:sp>
         <p:nvSpPr>
@@ -4147,6 +4243,10 @@
           </a:solidFill>
           <a:ln/>
         </p:spPr>
+        <p:txBody>
+          <a:bodyPr/>
+          <a:p/>
+        </p:txBody>
       </p:sp>
       <p:sp>
         <p:nvSpPr>
@@ -4313,6 +4413,10 @@
             </a:outerShdw>
           </a:effectLst>
         </p:spPr>
+        <p:txBody>
+          <a:bodyPr/>
+          <a:p/>
+        </p:txBody>
       </p:sp>
       <p:sp>
         <p:nvSpPr>
@@ -4333,6 +4437,10 @@
           </a:solidFill>
           <a:ln/>
         </p:spPr>
+        <p:txBody>
+          <a:bodyPr/>
+          <a:p/>
+        </p:txBody>
       </p:sp>
       <p:sp>
         <p:nvSpPr>
@@ -4499,6 +4607,10 @@
             </a:outerShdw>
           </a:effectLst>
         </p:spPr>
+        <p:txBody>
+          <a:bodyPr/>
+          <a:p/>
+        </p:txBody>
       </p:sp>
       <p:sp>
         <p:nvSpPr>
@@ -4519,6 +4631,10 @@
           </a:solidFill>
           <a:ln/>
         </p:spPr>
+        <p:txBody>
+          <a:bodyPr/>
+          <a:p/>
+        </p:txBody>
       </p:sp>
       <p:sp>
         <p:nvSpPr>
@@ -4793,6 +4909,10 @@
             </a:outerShdw>
           </a:effectLst>
         </p:spPr>
+        <p:txBody>
+          <a:bodyPr/>
+          <a:p/>
+        </p:txBody>
       </p:sp>
       <p:sp>
         <p:nvSpPr>
@@ -4880,6 +5000,10 @@
           </a:solidFill>
           <a:ln/>
         </p:spPr>
+        <p:txBody>
+          <a:bodyPr/>
+          <a:p/>
+        </p:txBody>
       </p:sp>
       <p:sp>
         <p:nvSpPr>
@@ -4907,6 +5031,10 @@
             </a:outerShdw>
           </a:effectLst>
         </p:spPr>
+        <p:txBody>
+          <a:bodyPr/>
+          <a:p/>
+        </p:txBody>
       </p:sp>
       <p:sp>
         <p:nvSpPr>
@@ -4972,6 +5100,10 @@
             </a:outerShdw>
           </a:effectLst>
         </p:spPr>
+        <p:txBody>
+          <a:bodyPr/>
+          <a:p/>
+        </p:txBody>
       </p:sp>
       <p:sp>
         <p:nvSpPr>
@@ -4992,6 +5124,10 @@
           </a:solidFill>
           <a:ln/>
         </p:spPr>
+        <p:txBody>
+          <a:bodyPr/>
+          <a:p/>
+        </p:txBody>
       </p:sp>
       <p:sp>
         <p:nvSpPr>
@@ -5200,6 +5336,10 @@
             </a:outerShdw>
           </a:effectLst>
         </p:spPr>
+        <p:txBody>
+          <a:bodyPr/>
+          <a:p/>
+        </p:txBody>
       </p:sp>
       <p:sp>
         <p:nvSpPr>
@@ -5220,6 +5360,10 @@
           </a:solidFill>
           <a:ln/>
         </p:spPr>
+        <p:txBody>
+          <a:bodyPr/>
+          <a:p/>
+        </p:txBody>
       </p:sp>
       <p:sp>
         <p:nvSpPr>
@@ -5428,6 +5572,10 @@
             </a:outerShdw>
           </a:effectLst>
         </p:spPr>
+        <p:txBody>
+          <a:bodyPr/>
+          <a:p/>
+        </p:txBody>
       </p:sp>
       <p:sp>
         <p:nvSpPr>
@@ -5448,6 +5596,10 @@
           </a:solidFill>
           <a:ln/>
         </p:spPr>
+        <p:txBody>
+          <a:bodyPr/>
+          <a:p/>
+        </p:txBody>
       </p:sp>
       <p:sp>
         <p:nvSpPr>
@@ -5725,6 +5877,10 @@
             </a:outerShdw>
           </a:effectLst>
         </p:spPr>
+        <p:txBody>
+          <a:bodyPr/>
+          <a:p/>
+        </p:txBody>
       </p:sp>
       <p:sp>
         <p:nvSpPr>
@@ -5823,6 +5979,10 @@
           </a:solidFill>
           <a:ln/>
         </p:spPr>
+        <p:txBody>
+          <a:bodyPr/>
+          <a:p/>
+        </p:txBody>
       </p:sp>
       <p:sp>
         <p:nvSpPr>
@@ -5852,6 +6012,10 @@
             </a:outerShdw>
           </a:effectLst>
         </p:spPr>
+        <p:txBody>
+          <a:bodyPr/>
+          <a:p/>
+        </p:txBody>
       </p:sp>
       <p:sp>
         <p:nvSpPr>
@@ -5913,6 +6077,10 @@
           </a:solidFill>
           <a:ln/>
         </p:spPr>
+        <p:txBody>
+          <a:bodyPr/>
+          <a:p/>
+        </p:txBody>
       </p:sp>
       <p:sp>
         <p:nvSpPr>
@@ -6016,6 +6184,10 @@
           </a:solidFill>
           <a:ln/>
         </p:spPr>
+        <p:txBody>
+          <a:bodyPr/>
+          <a:p/>
+        </p:txBody>
       </p:sp>
       <p:sp>
         <p:nvSpPr>
@@ -6126,6 +6298,10 @@
             </a:outerShdw>
           </a:effectLst>
         </p:spPr>
+        <p:txBody>
+          <a:bodyPr/>
+          <a:p/>
+        </p:txBody>
       </p:sp>
       <p:sp>
         <p:nvSpPr>
@@ -6482,6 +6658,10 @@
             </a:outerShdw>
           </a:effectLst>
         </p:spPr>
+        <p:txBody>
+          <a:bodyPr/>
+          <a:p/>
+        </p:txBody>
       </p:sp>
       <p:sp>
         <p:nvSpPr>
@@ -6580,6 +6760,10 @@
           </a:solidFill>
           <a:ln/>
         </p:spPr>
+        <p:txBody>
+          <a:bodyPr/>
+          <a:p/>
+        </p:txBody>
       </p:sp>
       <p:sp>
         <p:nvSpPr>
@@ -6609,6 +6793,10 @@
             </a:outerShdw>
           </a:effectLst>
         </p:spPr>
+        <p:txBody>
+          <a:bodyPr/>
+          <a:p/>
+        </p:txBody>
       </p:sp>
       <p:sp>
         <p:nvSpPr>
@@ -6807,6 +6995,10 @@
             </a:outerShdw>
           </a:effectLst>
         </p:spPr>
+        <p:txBody>
+          <a:bodyPr/>
+          <a:p/>
+        </p:txBody>
       </p:sp>
       <p:sp>
         <p:nvSpPr>
@@ -7111,6 +7303,10 @@
             </a:outerShdw>
           </a:effectLst>
         </p:spPr>
+        <p:txBody>
+          <a:bodyPr/>
+          <a:p/>
+        </p:txBody>
       </p:sp>
       <p:sp>
         <p:nvSpPr>
@@ -7209,6 +7405,10 @@
           </a:solidFill>
           <a:ln/>
         </p:spPr>
+        <p:txBody>
+          <a:bodyPr/>
+          <a:p/>
+        </p:txBody>
       </p:sp>
       <p:sp>
         <p:nvSpPr>
@@ -7238,6 +7438,10 @@
             </a:outerShdw>
           </a:effectLst>
         </p:spPr>
+        <p:txBody>
+          <a:bodyPr/>
+          <a:p/>
+        </p:txBody>
       </p:sp>
       <p:sp>
         <p:nvSpPr>
@@ -7258,6 +7462,10 @@
           </a:solidFill>
           <a:ln/>
         </p:spPr>
+        <p:txBody>
+          <a:bodyPr/>
+          <a:p/>
+        </p:txBody>
       </p:sp>
       <p:sp>
         <p:nvSpPr>
@@ -7328,7 +7536,7 @@
                 <a:ea typeface="맑은 고딕" pitchFamily="34" charset="-122"/>
                 <a:cs typeface="맑은 고딕" pitchFamily="34" charset="-120"/>
               </a:rPr>
-              <a:t>부르면 시작돼요</a:t>
+              <a:t>전화처럼 대화해요</a:t>
             </a:r>
             <a:endParaRPr lang="en-US" sz="2300" dirty="0"/>
           </a:p>
@@ -7370,7 +7578,7 @@
                 <a:ea typeface="맑은 고딕" pitchFamily="34" charset="-122"/>
                 <a:cs typeface="맑은 고딕" pitchFamily="34" charset="-120"/>
               </a:rPr>
-              <a:t>앱을 열고 AI 이름을</a:t>
+              <a:t>앱을 열고 [📞 대화 시작하기]를</a:t>
             </a:r>
             <a:endParaRPr lang="en-US" sz="1500" dirty="0"/>
           </a:p>
@@ -7390,7 +7598,7 @@
                 <a:ea typeface="맑은 고딕" pitchFamily="34" charset="-122"/>
                 <a:cs typeface="맑은 고딕" pitchFamily="34" charset="-120"/>
               </a:rPr>
-              <a:t>부르면 바로 대화가 시작돼요.</a:t>
+              <a:t>누르면 AI가 먼저 인사해요.</a:t>
             </a:r>
             <a:endParaRPr lang="en-US" sz="1500" dirty="0"/>
           </a:p>
@@ -7410,7 +7618,7 @@
                 <a:ea typeface="맑은 고딕" pitchFamily="34" charset="-122"/>
                 <a:cs typeface="맑은 고딕" pitchFamily="34" charset="-120"/>
               </a:rPr>
-              <a:t>(예: "민지야" 또는 "마음아")</a:t>
+              <a:t>그다음은 그냥 편하게 말씀하세요.</a:t>
             </a:r>
             <a:endParaRPr lang="en-US" sz="1500" dirty="0"/>
           </a:p>
@@ -7430,7 +7638,7 @@
                 <a:ea typeface="맑은 고딕" pitchFamily="34" charset="-122"/>
                 <a:cs typeface="맑은 고딕" pitchFamily="34" charset="-120"/>
               </a:rPr>
-              <a:t>버튼을 누를 필요 없어요.</a:t>
+              <a:t>말 중간에 끼어들어도 알아들어요.</a:t>
             </a:r>
             <a:endParaRPr lang="en-US" sz="1500" dirty="0"/>
           </a:p>
@@ -7464,6 +7672,10 @@
             </a:outerShdw>
           </a:effectLst>
         </p:spPr>
+        <p:txBody>
+          <a:bodyPr/>
+          <a:p/>
+        </p:txBody>
       </p:sp>
       <p:sp>
         <p:nvSpPr>
@@ -7484,6 +7696,10 @@
           </a:solidFill>
           <a:ln/>
         </p:spPr>
+        <p:txBody>
+          <a:bodyPr/>
+          <a:p/>
+        </p:txBody>
       </p:sp>
       <p:sp>
         <p:nvSpPr>
@@ -7616,7 +7832,7 @@
                 <a:ea typeface="맑은 고딕" pitchFamily="34" charset="-122"/>
                 <a:cs typeface="맑은 고딕" pitchFamily="34" charset="-120"/>
               </a:rPr>
-              <a:t>화면 아래 [글씨 대화로 전환]을</a:t>
+              <a:t>화면 위 [글씨로 대화]를</a:t>
             </a:r>
             <a:endParaRPr lang="en-US" sz="1500" dirty="0"/>
           </a:p>
@@ -7670,6 +7886,10 @@
             </a:outerShdw>
           </a:effectLst>
         </p:spPr>
+        <p:txBody>
+          <a:bodyPr/>
+          <a:p/>
+        </p:txBody>
       </p:sp>
       <p:sp>
         <p:nvSpPr>
@@ -7704,7 +7924,7 @@
                 <a:ea typeface="맑은 고딕" pitchFamily="34" charset="-122"/>
                 <a:cs typeface="맑은 고딕" pitchFamily="34" charset="-120"/>
               </a:rPr>
-              <a:t>👵💬  잠깐 쉬고 싶으면 "그만" 하고 말씀하세요. 다시 이야기하고 싶으면 이름을 부르면 돼요.</a:t>
+              <a:t>👵💬  잠깐 쉬고 싶으면 “그만” 하고 말씀하세요. [다시 대화하기] 버튼을 누르면 언제든 이어져요.</a:t>
             </a:r>
             <a:endParaRPr lang="en-US" sz="1800" dirty="0"/>
           </a:p>
@@ -7846,6 +8066,10 @@
             </a:outerShdw>
           </a:effectLst>
         </p:spPr>
+        <p:txBody>
+          <a:bodyPr/>
+          <a:p/>
+        </p:txBody>
       </p:sp>
       <p:sp>
         <p:nvSpPr>
@@ -7933,6 +8157,10 @@
           </a:solidFill>
           <a:ln/>
         </p:spPr>
+        <p:txBody>
+          <a:bodyPr/>
+          <a:p/>
+        </p:txBody>
       </p:sp>
       <p:sp>
         <p:nvSpPr>
@@ -7960,6 +8188,10 @@
             </a:outerShdw>
           </a:effectLst>
         </p:spPr>
+        <p:txBody>
+          <a:bodyPr/>
+          <a:p/>
+        </p:txBody>
       </p:sp>
       <p:sp>
         <p:nvSpPr>
@@ -8025,6 +8257,10 @@
             </a:outerShdw>
           </a:effectLst>
         </p:spPr>
+        <p:txBody>
+          <a:bodyPr/>
+          <a:p/>
+        </p:txBody>
       </p:sp>
       <p:sp>
         <p:nvSpPr>
@@ -8116,6 +8352,10 @@
             </a:outerShdw>
           </a:effectLst>
         </p:spPr>
+        <p:txBody>
+          <a:bodyPr/>
+          <a:p/>
+        </p:txBody>
       </p:sp>
       <p:sp>
         <p:nvSpPr>
@@ -8246,6 +8486,10 @@
             </a:outerShdw>
           </a:effectLst>
         </p:spPr>
+        <p:txBody>
+          <a:bodyPr/>
+          <a:p/>
+        </p:txBody>
       </p:sp>
       <p:sp>
         <p:nvSpPr>
@@ -8484,6 +8728,10 @@
             </a:outerShdw>
           </a:effectLst>
         </p:spPr>
+        <p:txBody>
+          <a:bodyPr/>
+          <a:p/>
+        </p:txBody>
       </p:sp>
       <p:sp>
         <p:nvSpPr>
@@ -8571,6 +8819,10 @@
           </a:solidFill>
           <a:ln/>
         </p:spPr>
+        <p:txBody>
+          <a:bodyPr/>
+          <a:p/>
+        </p:txBody>
       </p:sp>
       <p:sp>
         <p:nvSpPr>
@@ -8598,6 +8850,10 @@
             </a:outerShdw>
           </a:effectLst>
         </p:spPr>
+        <p:txBody>
+          <a:bodyPr/>
+          <a:p/>
+        </p:txBody>
       </p:sp>
       <p:sp>
         <p:nvSpPr>
@@ -8663,6 +8919,10 @@
             </a:outerShdw>
           </a:effectLst>
         </p:spPr>
+        <p:txBody>
+          <a:bodyPr/>
+          <a:p/>
+        </p:txBody>
       </p:sp>
       <p:sp>
         <p:nvSpPr>
@@ -8683,6 +8943,10 @@
           </a:solidFill>
           <a:ln/>
         </p:spPr>
+        <p:txBody>
+          <a:bodyPr/>
+          <a:p/>
+        </p:txBody>
       </p:sp>
       <p:sp>
         <p:nvSpPr>
@@ -8872,6 +9136,10 @@
             </a:outerShdw>
           </a:effectLst>
         </p:spPr>
+        <p:txBody>
+          <a:bodyPr/>
+          <a:p/>
+        </p:txBody>
       </p:sp>
       <p:sp>
         <p:nvSpPr>
@@ -8892,6 +9160,10 @@
           </a:solidFill>
           <a:ln/>
         </p:spPr>
+        <p:txBody>
+          <a:bodyPr/>
+          <a:p/>
+        </p:txBody>
       </p:sp>
       <p:sp>
         <p:nvSpPr>
@@ -9081,6 +9353,10 @@
             </a:outerShdw>
           </a:effectLst>
         </p:spPr>
+        <p:txBody>
+          <a:bodyPr/>
+          <a:p/>
+        </p:txBody>
       </p:sp>
       <p:sp>
         <p:nvSpPr>
@@ -9101,6 +9377,10 @@
           </a:solidFill>
           <a:ln/>
         </p:spPr>
+        <p:txBody>
+          <a:bodyPr/>
+          <a:p/>
+        </p:txBody>
       </p:sp>
       <p:sp>
         <p:nvSpPr>
@@ -9432,6 +9712,10 @@
           </a:solidFill>
           <a:ln/>
         </p:spPr>
+        <p:txBody>
+          <a:bodyPr/>
+          <a:p/>
+        </p:txBody>
       </p:sp>
       <p:sp>
         <p:nvSpPr>
@@ -9536,6 +9820,10 @@
             </a:outerShdw>
           </a:effectLst>
         </p:spPr>
+        <p:txBody>
+          <a:bodyPr/>
+          <a:p/>
+        </p:txBody>
       </p:sp>
       <p:sp>
         <p:nvSpPr>
@@ -9695,6 +9983,10 @@
             </a:outerShdw>
           </a:effectLst>
         </p:spPr>
+        <p:txBody>
+          <a:bodyPr/>
+          <a:p/>
+        </p:txBody>
       </p:sp>
       <p:sp>
         <p:nvSpPr>

--- a/docs/마음이음_사용설명서.pptx
+++ b/docs/마음이음_사용설명서.pptx
@@ -17,6 +17,8 @@
     <p:sldId id="265" r:id="rId11"/>
     <p:sldId id="266" r:id="rId12"/>
     <p:sldId id="267" r:id="rId13"/>
+    <p:sldId id="268" r:id="rId19"/>
+    <p:sldId id="269" r:id="rId20"/>
   </p:sldIdLst>
   <p:notesMasterIdLst>
     <p:notesMasterId r:id="rId14"/>
@@ -3916,6 +3918,2215 @@
 </p:sld>
 </file>
 
+<file path=ppt/slides/slide13.xml><?xml version="1.0" encoding="utf-8"?>
+<p:sld xmlns:a="http://schemas.openxmlformats.org/drawingml/2006/main" xmlns:p="http://schemas.openxmlformats.org/presentationml/2006/main" xmlns:r="http://schemas.openxmlformats.org/officeDocument/2006/relationships">
+  <p:cSld>
+    <p:bg>
+      <p:bgPr>
+        <a:solidFill>
+          <a:srgbClr val="F4F7F7"/>
+        </a:solidFill>
+        <a:effectLst/>
+      </p:bgPr>
+    </p:bg>
+    <p:spTree>
+      <p:nvGrpSpPr>
+        <p:cNvPr id="1" name=""/>
+        <p:cNvGrpSpPr/>
+        <p:nvPr/>
+      </p:nvGrpSpPr>
+      <p:grpSpPr/>
+      <p:sp>
+        <p:nvSpPr>
+          <p:cNvPr id="2" name="Rectangle 1"/>
+          <p:cNvSpPr/>
+          <p:nvPr/>
+        </p:nvSpPr>
+        <p:spPr>
+          <a:xfrm>
+            <a:off x="0" y="0"/>
+            <a:ext cx="12192000" cy="914400"/>
+          </a:xfrm>
+          <a:prstGeom prst="rect">
+            <a:avLst/>
+          </a:prstGeom>
+          <a:solidFill>
+            <a:srgbClr val="0E2A33"/>
+          </a:solidFill>
+          <a:ln>
+            <a:noFill/>
+          </a:ln>
+        </p:spPr>
+        <p:style>
+          <a:lnRef idx="1">
+            <a:schemeClr val="accent1"/>
+          </a:lnRef>
+          <a:fillRef idx="3">
+            <a:schemeClr val="accent1"/>
+          </a:fillRef>
+          <a:effectRef idx="2">
+            <a:schemeClr val="accent1"/>
+          </a:effectRef>
+          <a:fontRef idx="minor">
+            <a:schemeClr val="lt1"/>
+          </a:fontRef>
+        </p:style>
+        <p:txBody>
+          <a:bodyPr rtlCol="0" anchor="ctr"/>
+          <a:lstStyle/>
+          <a:p>
+            <a:pPr algn="ctr"/>
+          </a:p>
+        </p:txBody>
+      </p:sp>
+      <p:sp>
+        <p:nvSpPr>
+          <p:cNvPr id="3" name="Oval 2"/>
+          <p:cNvSpPr/>
+          <p:nvPr/>
+        </p:nvSpPr>
+        <p:spPr>
+          <a:xfrm>
+            <a:off x="411480" y="219456"/>
+            <a:ext cx="502920" cy="502920"/>
+          </a:xfrm>
+          <a:prstGeom prst="ellipse">
+            <a:avLst/>
+          </a:prstGeom>
+          <a:solidFill>
+            <a:srgbClr val="F59E0B"/>
+          </a:solidFill>
+          <a:ln>
+            <a:noFill/>
+          </a:ln>
+        </p:spPr>
+        <p:style>
+          <a:lnRef idx="1">
+            <a:schemeClr val="accent1"/>
+          </a:lnRef>
+          <a:fillRef idx="3">
+            <a:schemeClr val="accent1"/>
+          </a:fillRef>
+          <a:effectRef idx="2">
+            <a:schemeClr val="accent1"/>
+          </a:effectRef>
+          <a:fontRef idx="minor">
+            <a:schemeClr val="lt1"/>
+          </a:fontRef>
+        </p:style>
+        <p:txBody>
+          <a:bodyPr rtlCol="0" anchor="ctr"/>
+          <a:lstStyle/>
+          <a:p>
+            <a:pPr algn="ctr"/>
+          </a:p>
+        </p:txBody>
+      </p:sp>
+      <p:sp>
+        <p:nvSpPr>
+          <p:cNvPr id="4" name="TextBox 3"/>
+          <p:cNvSpPr txBox="1"/>
+          <p:nvPr/>
+        </p:nvSpPr>
+        <p:spPr>
+          <a:xfrm>
+            <a:off x="411480" y="228600"/>
+            <a:ext cx="502920" cy="484632"/>
+          </a:xfrm>
+          <a:prstGeom prst="rect">
+            <a:avLst/>
+          </a:prstGeom>
+          <a:noFill/>
+        </p:spPr>
+        <p:txBody>
+          <a:bodyPr wrap="square" anchor="ctr" lIns="0" rIns="0" tIns="0" bIns="0">
+            <a:spAutoFit/>
+          </a:bodyPr>
+          <a:lstStyle/>
+          <a:p>
+            <a:pPr algn="ctr">
+              <a:lnSpc>
+                <a:spcPct val="105000"/>
+              </a:lnSpc>
+            </a:pPr>
+            <a:r>
+              <a:rPr sz="2000" b="1">
+                <a:solidFill>
+                  <a:srgbClr val="0E2A33"/>
+                </a:solidFill>
+                <a:latin typeface="맑은 고딕"/>
+              </a:rPr>
+              <a:t>＋</a:t>
+            </a:r>
+          </a:p>
+        </p:txBody>
+      </p:sp>
+      <p:sp>
+        <p:nvSpPr>
+          <p:cNvPr id="5" name="TextBox 4"/>
+          <p:cNvSpPr txBox="1"/>
+          <p:nvPr/>
+        </p:nvSpPr>
+        <p:spPr>
+          <a:xfrm>
+            <a:off x="1097280" y="182880"/>
+            <a:ext cx="10363200" cy="548640"/>
+          </a:xfrm>
+          <a:prstGeom prst="rect">
+            <a:avLst/>
+          </a:prstGeom>
+          <a:noFill/>
+        </p:spPr>
+        <p:txBody>
+          <a:bodyPr wrap="square" anchor="ctr" lIns="0" rIns="0" tIns="0" bIns="0">
+            <a:spAutoFit/>
+          </a:bodyPr>
+          <a:lstStyle/>
+          <a:p>
+            <a:pPr algn="l">
+              <a:lnSpc>
+                <a:spcPct val="105000"/>
+              </a:lnSpc>
+            </a:pPr>
+            <a:r>
+              <a:rPr sz="2400" b="1">
+                <a:solidFill>
+                  <a:srgbClr val="FFFFFF"/>
+                </a:solidFill>
+                <a:latin typeface="맑은 고딕"/>
+              </a:rPr>
+              <a:t>화면 위쪽 단추 안내</a:t>
+            </a:r>
+          </a:p>
+        </p:txBody>
+      </p:sp>
+      <p:pic>
+        <p:nvPicPr>
+          <p:cNvPr id="6" name="Picture 5" descr="_live_header.png"/>
+          <p:cNvPicPr>
+            <a:picLocks noChangeAspect="1"/>
+          </p:cNvPicPr>
+          <p:nvPr/>
+        </p:nvPicPr>
+        <p:blipFill>
+          <a:blip r:embed="rId2"/>
+          <a:stretch>
+            <a:fillRect/>
+          </a:stretch>
+        </p:blipFill>
+        <p:spPr>
+          <a:xfrm>
+            <a:off x="2164080" y="1143000"/>
+            <a:ext cx="7863840" cy="1572768"/>
+          </a:xfrm>
+          <a:prstGeom prst="rect">
+            <a:avLst/>
+          </a:prstGeom>
+          <a:ln w="12700">
+            <a:solidFill>
+              <a:srgbClr val="D0D5D8"/>
+            </a:solidFill>
+          </a:ln>
+        </p:spPr>
+      </p:pic>
+      <p:sp>
+        <p:nvSpPr>
+          <p:cNvPr id="7" name="Rounded Rectangle 6"/>
+          <p:cNvSpPr/>
+          <p:nvPr/>
+        </p:nvSpPr>
+        <p:spPr>
+          <a:xfrm>
+            <a:off x="5308701" y="1426098"/>
+            <a:ext cx="1417320" cy="975116"/>
+          </a:xfrm>
+          <a:prstGeom prst="roundRect">
+            <a:avLst/>
+          </a:prstGeom>
+          <a:noFill/>
+          <a:ln w="38100">
+            <a:solidFill>
+              <a:srgbClr val="F59E0B"/>
+            </a:solidFill>
+          </a:ln>
+        </p:spPr>
+        <p:style>
+          <a:lnRef idx="1">
+            <a:schemeClr val="accent1"/>
+          </a:lnRef>
+          <a:fillRef idx="3">
+            <a:schemeClr val="accent1"/>
+          </a:fillRef>
+          <a:effectRef idx="2">
+            <a:schemeClr val="accent1"/>
+          </a:effectRef>
+          <a:fontRef idx="minor">
+            <a:schemeClr val="lt1"/>
+          </a:fontRef>
+        </p:style>
+        <p:txBody>
+          <a:bodyPr rtlCol="0" anchor="ctr"/>
+          <a:lstStyle/>
+          <a:p>
+            <a:pPr algn="ctr"/>
+          </a:p>
+        </p:txBody>
+      </p:sp>
+      <p:sp>
+        <p:nvSpPr>
+          <p:cNvPr id="8" name="Oval 7"/>
+          <p:cNvSpPr/>
+          <p:nvPr/>
+        </p:nvSpPr>
+        <p:spPr>
+          <a:xfrm>
+            <a:off x="5825337" y="2779776"/>
+            <a:ext cx="384048" cy="384048"/>
+          </a:xfrm>
+          <a:prstGeom prst="ellipse">
+            <a:avLst/>
+          </a:prstGeom>
+          <a:solidFill>
+            <a:srgbClr val="F59E0B"/>
+          </a:solidFill>
+          <a:ln w="25400">
+            <a:solidFill>
+              <a:srgbClr val="FFFFFF"/>
+            </a:solidFill>
+          </a:ln>
+        </p:spPr>
+        <p:style>
+          <a:lnRef idx="1">
+            <a:schemeClr val="accent1"/>
+          </a:lnRef>
+          <a:fillRef idx="3">
+            <a:schemeClr val="accent1"/>
+          </a:fillRef>
+          <a:effectRef idx="2">
+            <a:schemeClr val="accent1"/>
+          </a:effectRef>
+          <a:fontRef idx="minor">
+            <a:schemeClr val="lt1"/>
+          </a:fontRef>
+        </p:style>
+        <p:txBody>
+          <a:bodyPr rtlCol="0" anchor="ctr" wrap="none" lIns="0" rIns="0" tIns="0" bIns="0"/>
+          <a:lstStyle/>
+          <a:p>
+            <a:pPr algn="ctr"/>
+            <a:r>
+              <a:rPr sz="1600" b="1">
+                <a:solidFill>
+                  <a:srgbClr val="FFFFFF"/>
+                </a:solidFill>
+                <a:latin typeface="맑은 고딕"/>
+              </a:rPr>
+              <a:t>1</a:t>
+            </a:r>
+          </a:p>
+        </p:txBody>
+      </p:sp>
+      <p:sp>
+        <p:nvSpPr>
+          <p:cNvPr id="9" name="Rounded Rectangle 8"/>
+          <p:cNvSpPr/>
+          <p:nvPr/>
+        </p:nvSpPr>
+        <p:spPr>
+          <a:xfrm>
+            <a:off x="7073493" y="1426098"/>
+            <a:ext cx="640080" cy="975116"/>
+          </a:xfrm>
+          <a:prstGeom prst="roundRect">
+            <a:avLst/>
+          </a:prstGeom>
+          <a:noFill/>
+          <a:ln w="38100">
+            <a:solidFill>
+              <a:srgbClr val="028090"/>
+            </a:solidFill>
+          </a:ln>
+        </p:spPr>
+        <p:style>
+          <a:lnRef idx="1">
+            <a:schemeClr val="accent1"/>
+          </a:lnRef>
+          <a:fillRef idx="3">
+            <a:schemeClr val="accent1"/>
+          </a:fillRef>
+          <a:effectRef idx="2">
+            <a:schemeClr val="accent1"/>
+          </a:effectRef>
+          <a:fontRef idx="minor">
+            <a:schemeClr val="lt1"/>
+          </a:fontRef>
+        </p:style>
+        <p:txBody>
+          <a:bodyPr rtlCol="0" anchor="ctr"/>
+          <a:lstStyle/>
+          <a:p>
+            <a:pPr algn="ctr"/>
+          </a:p>
+        </p:txBody>
+      </p:sp>
+      <p:sp>
+        <p:nvSpPr>
+          <p:cNvPr id="10" name="Oval 9"/>
+          <p:cNvSpPr/>
+          <p:nvPr/>
+        </p:nvSpPr>
+        <p:spPr>
+          <a:xfrm>
+            <a:off x="7201509" y="2779776"/>
+            <a:ext cx="384048" cy="384048"/>
+          </a:xfrm>
+          <a:prstGeom prst="ellipse">
+            <a:avLst/>
+          </a:prstGeom>
+          <a:solidFill>
+            <a:srgbClr val="028090"/>
+          </a:solidFill>
+          <a:ln w="25400">
+            <a:solidFill>
+              <a:srgbClr val="FFFFFF"/>
+            </a:solidFill>
+          </a:ln>
+        </p:spPr>
+        <p:style>
+          <a:lnRef idx="1">
+            <a:schemeClr val="accent1"/>
+          </a:lnRef>
+          <a:fillRef idx="3">
+            <a:schemeClr val="accent1"/>
+          </a:fillRef>
+          <a:effectRef idx="2">
+            <a:schemeClr val="accent1"/>
+          </a:effectRef>
+          <a:fontRef idx="minor">
+            <a:schemeClr val="lt1"/>
+          </a:fontRef>
+        </p:style>
+        <p:txBody>
+          <a:bodyPr rtlCol="0" anchor="ctr" wrap="none" lIns="0" rIns="0" tIns="0" bIns="0"/>
+          <a:lstStyle/>
+          <a:p>
+            <a:pPr algn="ctr"/>
+            <a:r>
+              <a:rPr sz="1600" b="1">
+                <a:solidFill>
+                  <a:srgbClr val="FFFFFF"/>
+                </a:solidFill>
+                <a:latin typeface="맑은 고딕"/>
+              </a:rPr>
+              <a:t>2</a:t>
+            </a:r>
+          </a:p>
+        </p:txBody>
+      </p:sp>
+      <p:sp>
+        <p:nvSpPr>
+          <p:cNvPr id="11" name="Rounded Rectangle 10"/>
+          <p:cNvSpPr/>
+          <p:nvPr/>
+        </p:nvSpPr>
+        <p:spPr>
+          <a:xfrm>
+            <a:off x="7938516" y="1426098"/>
+            <a:ext cx="640080" cy="975116"/>
+          </a:xfrm>
+          <a:prstGeom prst="roundRect">
+            <a:avLst/>
+          </a:prstGeom>
+          <a:noFill/>
+          <a:ln w="38100">
+            <a:solidFill>
+              <a:srgbClr val="00A896"/>
+            </a:solidFill>
+          </a:ln>
+        </p:spPr>
+        <p:style>
+          <a:lnRef idx="1">
+            <a:schemeClr val="accent1"/>
+          </a:lnRef>
+          <a:fillRef idx="3">
+            <a:schemeClr val="accent1"/>
+          </a:fillRef>
+          <a:effectRef idx="2">
+            <a:schemeClr val="accent1"/>
+          </a:effectRef>
+          <a:fontRef idx="minor">
+            <a:schemeClr val="lt1"/>
+          </a:fontRef>
+        </p:style>
+        <p:txBody>
+          <a:bodyPr rtlCol="0" anchor="ctr"/>
+          <a:lstStyle/>
+          <a:p>
+            <a:pPr algn="ctr"/>
+          </a:p>
+        </p:txBody>
+      </p:sp>
+      <p:sp>
+        <p:nvSpPr>
+          <p:cNvPr id="12" name="Oval 11"/>
+          <p:cNvSpPr/>
+          <p:nvPr/>
+        </p:nvSpPr>
+        <p:spPr>
+          <a:xfrm>
+            <a:off x="8066531" y="2779776"/>
+            <a:ext cx="384048" cy="384048"/>
+          </a:xfrm>
+          <a:prstGeom prst="ellipse">
+            <a:avLst/>
+          </a:prstGeom>
+          <a:solidFill>
+            <a:srgbClr val="00A896"/>
+          </a:solidFill>
+          <a:ln w="25400">
+            <a:solidFill>
+              <a:srgbClr val="FFFFFF"/>
+            </a:solidFill>
+          </a:ln>
+        </p:spPr>
+        <p:style>
+          <a:lnRef idx="1">
+            <a:schemeClr val="accent1"/>
+          </a:lnRef>
+          <a:fillRef idx="3">
+            <a:schemeClr val="accent1"/>
+          </a:fillRef>
+          <a:effectRef idx="2">
+            <a:schemeClr val="accent1"/>
+          </a:effectRef>
+          <a:fontRef idx="minor">
+            <a:schemeClr val="lt1"/>
+          </a:fontRef>
+        </p:style>
+        <p:txBody>
+          <a:bodyPr rtlCol="0" anchor="ctr" wrap="none" lIns="0" rIns="0" tIns="0" bIns="0"/>
+          <a:lstStyle/>
+          <a:p>
+            <a:pPr algn="ctr"/>
+            <a:r>
+              <a:rPr sz="1600" b="1">
+                <a:solidFill>
+                  <a:srgbClr val="FFFFFF"/>
+                </a:solidFill>
+                <a:latin typeface="맑은 고딕"/>
+              </a:rPr>
+              <a:t>3</a:t>
+            </a:r>
+          </a:p>
+        </p:txBody>
+      </p:sp>
+      <p:sp>
+        <p:nvSpPr>
+          <p:cNvPr id="13" name="Rounded Rectangle 12"/>
+          <p:cNvSpPr/>
+          <p:nvPr/>
+        </p:nvSpPr>
+        <p:spPr>
+          <a:xfrm>
+            <a:off x="8803538" y="1426098"/>
+            <a:ext cx="640080" cy="975116"/>
+          </a:xfrm>
+          <a:prstGeom prst="roundRect">
+            <a:avLst/>
+          </a:prstGeom>
+          <a:noFill/>
+          <a:ln w="38100">
+            <a:solidFill>
+              <a:srgbClr val="5B6B73"/>
+            </a:solidFill>
+          </a:ln>
+        </p:spPr>
+        <p:style>
+          <a:lnRef idx="1">
+            <a:schemeClr val="accent1"/>
+          </a:lnRef>
+          <a:fillRef idx="3">
+            <a:schemeClr val="accent1"/>
+          </a:fillRef>
+          <a:effectRef idx="2">
+            <a:schemeClr val="accent1"/>
+          </a:effectRef>
+          <a:fontRef idx="minor">
+            <a:schemeClr val="lt1"/>
+          </a:fontRef>
+        </p:style>
+        <p:txBody>
+          <a:bodyPr rtlCol="0" anchor="ctr"/>
+          <a:lstStyle/>
+          <a:p>
+            <a:pPr algn="ctr"/>
+          </a:p>
+        </p:txBody>
+      </p:sp>
+      <p:sp>
+        <p:nvSpPr>
+          <p:cNvPr id="14" name="Oval 13"/>
+          <p:cNvSpPr/>
+          <p:nvPr/>
+        </p:nvSpPr>
+        <p:spPr>
+          <a:xfrm>
+            <a:off x="8931554" y="2779776"/>
+            <a:ext cx="384048" cy="384048"/>
+          </a:xfrm>
+          <a:prstGeom prst="ellipse">
+            <a:avLst/>
+          </a:prstGeom>
+          <a:solidFill>
+            <a:srgbClr val="5B6B73"/>
+          </a:solidFill>
+          <a:ln w="25400">
+            <a:solidFill>
+              <a:srgbClr val="FFFFFF"/>
+            </a:solidFill>
+          </a:ln>
+        </p:spPr>
+        <p:style>
+          <a:lnRef idx="1">
+            <a:schemeClr val="accent1"/>
+          </a:lnRef>
+          <a:fillRef idx="3">
+            <a:schemeClr val="accent1"/>
+          </a:fillRef>
+          <a:effectRef idx="2">
+            <a:schemeClr val="accent1"/>
+          </a:effectRef>
+          <a:fontRef idx="minor">
+            <a:schemeClr val="lt1"/>
+          </a:fontRef>
+        </p:style>
+        <p:txBody>
+          <a:bodyPr rtlCol="0" anchor="ctr" wrap="none" lIns="0" rIns="0" tIns="0" bIns="0"/>
+          <a:lstStyle/>
+          <a:p>
+            <a:pPr algn="ctr"/>
+            <a:r>
+              <a:rPr sz="1600" b="1">
+                <a:solidFill>
+                  <a:srgbClr val="FFFFFF"/>
+                </a:solidFill>
+                <a:latin typeface="맑은 고딕"/>
+              </a:rPr>
+              <a:t>4</a:t>
+            </a:r>
+          </a:p>
+        </p:txBody>
+      </p:sp>
+      <p:sp>
+        <p:nvSpPr>
+          <p:cNvPr id="15" name="Oval 14"/>
+          <p:cNvSpPr/>
+          <p:nvPr/>
+        </p:nvSpPr>
+        <p:spPr>
+          <a:xfrm>
+            <a:off x="667512" y="3383280"/>
+            <a:ext cx="457200" cy="457200"/>
+          </a:xfrm>
+          <a:prstGeom prst="ellipse">
+            <a:avLst/>
+          </a:prstGeom>
+          <a:solidFill>
+            <a:srgbClr val="F59E0B"/>
+          </a:solidFill>
+          <a:ln w="25400">
+            <a:solidFill>
+              <a:srgbClr val="FFFFFF"/>
+            </a:solidFill>
+          </a:ln>
+        </p:spPr>
+        <p:style>
+          <a:lnRef idx="1">
+            <a:schemeClr val="accent1"/>
+          </a:lnRef>
+          <a:fillRef idx="3">
+            <a:schemeClr val="accent1"/>
+          </a:fillRef>
+          <a:effectRef idx="2">
+            <a:schemeClr val="accent1"/>
+          </a:effectRef>
+          <a:fontRef idx="minor">
+            <a:schemeClr val="lt1"/>
+          </a:fontRef>
+        </p:style>
+        <p:txBody>
+          <a:bodyPr rtlCol="0" anchor="ctr" wrap="none" lIns="0" rIns="0" tIns="0" bIns="0"/>
+          <a:lstStyle/>
+          <a:p>
+            <a:pPr algn="ctr"/>
+            <a:r>
+              <a:rPr sz="1600" b="1">
+                <a:solidFill>
+                  <a:srgbClr val="FFFFFF"/>
+                </a:solidFill>
+                <a:latin typeface="맑은 고딕"/>
+              </a:rPr>
+              <a:t>1</a:t>
+            </a:r>
+          </a:p>
+        </p:txBody>
+      </p:sp>
+      <p:sp>
+        <p:nvSpPr>
+          <p:cNvPr id="16" name="TextBox 15"/>
+          <p:cNvSpPr txBox="1"/>
+          <p:nvPr/>
+        </p:nvSpPr>
+        <p:spPr>
+          <a:xfrm>
+            <a:off x="1243584" y="3392424"/>
+            <a:ext cx="2179320" cy="365760"/>
+          </a:xfrm>
+          <a:prstGeom prst="rect">
+            <a:avLst/>
+          </a:prstGeom>
+          <a:noFill/>
+        </p:spPr>
+        <p:txBody>
+          <a:bodyPr wrap="square" anchor="t" lIns="0" rIns="0" tIns="0" bIns="0">
+            <a:spAutoFit/>
+          </a:bodyPr>
+          <a:lstStyle/>
+          <a:p>
+            <a:pPr algn="l">
+              <a:lnSpc>
+                <a:spcPct val="105000"/>
+              </a:lnSpc>
+            </a:pPr>
+            <a:r>
+              <a:rPr sz="1450" b="1">
+                <a:solidFill>
+                  <a:srgbClr val="1F2A30"/>
+                </a:solidFill>
+                <a:latin typeface="맑은 고딕"/>
+              </a:rPr>
+              <a:t>👂 상시 감시</a:t>
+            </a:r>
+          </a:p>
+        </p:txBody>
+      </p:sp>
+      <p:sp>
+        <p:nvSpPr>
+          <p:cNvPr id="17" name="TextBox 16"/>
+          <p:cNvSpPr txBox="1"/>
+          <p:nvPr/>
+        </p:nvSpPr>
+        <p:spPr>
+          <a:xfrm>
+            <a:off x="640080" y="3922776"/>
+            <a:ext cx="2590800" cy="822960"/>
+          </a:xfrm>
+          <a:prstGeom prst="rect">
+            <a:avLst/>
+          </a:prstGeom>
+          <a:noFill/>
+        </p:spPr>
+        <p:txBody>
+          <a:bodyPr wrap="square" anchor="t" lIns="0" rIns="0" tIns="0" bIns="0">
+            <a:spAutoFit/>
+          </a:bodyPr>
+          <a:lstStyle/>
+          <a:p>
+            <a:pPr algn="l">
+              <a:lnSpc>
+                <a:spcPct val="110000"/>
+              </a:lnSpc>
+            </a:pPr>
+            <a:r>
+              <a:rPr sz="1150" b="0">
+                <a:solidFill>
+                  <a:srgbClr val="5B6B73"/>
+                </a:solidFill>
+                <a:latin typeface="맑은 고딕"/>
+              </a:rPr>
+              <a:t>환자 목소리를 상시로 살펴요 (보호자용·별도 안내서 참고)</a:t>
+            </a:r>
+          </a:p>
+        </p:txBody>
+      </p:sp>
+      <p:sp>
+        <p:nvSpPr>
+          <p:cNvPr id="18" name="Oval 17"/>
+          <p:cNvSpPr/>
+          <p:nvPr/>
+        </p:nvSpPr>
+        <p:spPr>
+          <a:xfrm>
+            <a:off x="3395472" y="3383280"/>
+            <a:ext cx="457200" cy="457200"/>
+          </a:xfrm>
+          <a:prstGeom prst="ellipse">
+            <a:avLst/>
+          </a:prstGeom>
+          <a:solidFill>
+            <a:srgbClr val="028090"/>
+          </a:solidFill>
+          <a:ln w="25400">
+            <a:solidFill>
+              <a:srgbClr val="FFFFFF"/>
+            </a:solidFill>
+          </a:ln>
+        </p:spPr>
+        <p:style>
+          <a:lnRef idx="1">
+            <a:schemeClr val="accent1"/>
+          </a:lnRef>
+          <a:fillRef idx="3">
+            <a:schemeClr val="accent1"/>
+          </a:fillRef>
+          <a:effectRef idx="2">
+            <a:schemeClr val="accent1"/>
+          </a:effectRef>
+          <a:fontRef idx="minor">
+            <a:schemeClr val="lt1"/>
+          </a:fontRef>
+        </p:style>
+        <p:txBody>
+          <a:bodyPr rtlCol="0" anchor="ctr" wrap="none" lIns="0" rIns="0" tIns="0" bIns="0"/>
+          <a:lstStyle/>
+          <a:p>
+            <a:pPr algn="ctr"/>
+            <a:r>
+              <a:rPr sz="1600" b="1">
+                <a:solidFill>
+                  <a:srgbClr val="FFFFFF"/>
+                </a:solidFill>
+                <a:latin typeface="맑은 고딕"/>
+              </a:rPr>
+              <a:t>2</a:t>
+            </a:r>
+          </a:p>
+        </p:txBody>
+      </p:sp>
+      <p:sp>
+        <p:nvSpPr>
+          <p:cNvPr id="19" name="TextBox 18"/>
+          <p:cNvSpPr txBox="1"/>
+          <p:nvPr/>
+        </p:nvSpPr>
+        <p:spPr>
+          <a:xfrm>
+            <a:off x="3971544" y="3392424"/>
+            <a:ext cx="2179320" cy="365760"/>
+          </a:xfrm>
+          <a:prstGeom prst="rect">
+            <a:avLst/>
+          </a:prstGeom>
+          <a:noFill/>
+        </p:spPr>
+        <p:txBody>
+          <a:bodyPr wrap="square" anchor="t" lIns="0" rIns="0" tIns="0" bIns="0">
+            <a:spAutoFit/>
+          </a:bodyPr>
+          <a:lstStyle/>
+          <a:p>
+            <a:pPr algn="l">
+              <a:lnSpc>
+                <a:spcPct val="105000"/>
+              </a:lnSpc>
+            </a:pPr>
+            <a:r>
+              <a:rPr sz="1450" b="1">
+                <a:solidFill>
+                  <a:srgbClr val="1F2A30"/>
+                </a:solidFill>
+                <a:latin typeface="맑은 고딕"/>
+              </a:rPr>
+              <a:t>💬 글자로 대화</a:t>
+            </a:r>
+          </a:p>
+        </p:txBody>
+      </p:sp>
+      <p:sp>
+        <p:nvSpPr>
+          <p:cNvPr id="20" name="TextBox 19"/>
+          <p:cNvSpPr txBox="1"/>
+          <p:nvPr/>
+        </p:nvSpPr>
+        <p:spPr>
+          <a:xfrm>
+            <a:off x="3368040" y="3922776"/>
+            <a:ext cx="2590800" cy="822960"/>
+          </a:xfrm>
+          <a:prstGeom prst="rect">
+            <a:avLst/>
+          </a:prstGeom>
+          <a:noFill/>
+        </p:spPr>
+        <p:txBody>
+          <a:bodyPr wrap="square" anchor="t" lIns="0" rIns="0" tIns="0" bIns="0">
+            <a:spAutoFit/>
+          </a:bodyPr>
+          <a:lstStyle/>
+          <a:p>
+            <a:pPr algn="l">
+              <a:lnSpc>
+                <a:spcPct val="110000"/>
+              </a:lnSpc>
+            </a:pPr>
+            <a:r>
+              <a:rPr sz="1150" b="0">
+                <a:solidFill>
+                  <a:srgbClr val="5B6B73"/>
+                </a:solidFill>
+                <a:latin typeface="맑은 고딕"/>
+              </a:rPr>
+              <a:t>말하기 어려우면 글자로 대화</a:t>
+            </a:r>
+          </a:p>
+        </p:txBody>
+      </p:sp>
+      <p:sp>
+        <p:nvSpPr>
+          <p:cNvPr id="21" name="Oval 20"/>
+          <p:cNvSpPr/>
+          <p:nvPr/>
+        </p:nvSpPr>
+        <p:spPr>
+          <a:xfrm>
+            <a:off x="6123432" y="3383280"/>
+            <a:ext cx="457200" cy="457200"/>
+          </a:xfrm>
+          <a:prstGeom prst="ellipse">
+            <a:avLst/>
+          </a:prstGeom>
+          <a:solidFill>
+            <a:srgbClr val="00A896"/>
+          </a:solidFill>
+          <a:ln w="25400">
+            <a:solidFill>
+              <a:srgbClr val="FFFFFF"/>
+            </a:solidFill>
+          </a:ln>
+        </p:spPr>
+        <p:style>
+          <a:lnRef idx="1">
+            <a:schemeClr val="accent1"/>
+          </a:lnRef>
+          <a:fillRef idx="3">
+            <a:schemeClr val="accent1"/>
+          </a:fillRef>
+          <a:effectRef idx="2">
+            <a:schemeClr val="accent1"/>
+          </a:effectRef>
+          <a:fontRef idx="minor">
+            <a:schemeClr val="lt1"/>
+          </a:fontRef>
+        </p:style>
+        <p:txBody>
+          <a:bodyPr rtlCol="0" anchor="ctr" wrap="none" lIns="0" rIns="0" tIns="0" bIns="0"/>
+          <a:lstStyle/>
+          <a:p>
+            <a:pPr algn="ctr"/>
+            <a:r>
+              <a:rPr sz="1600" b="1">
+                <a:solidFill>
+                  <a:srgbClr val="FFFFFF"/>
+                </a:solidFill>
+                <a:latin typeface="맑은 고딕"/>
+              </a:rPr>
+              <a:t>3</a:t>
+            </a:r>
+          </a:p>
+        </p:txBody>
+      </p:sp>
+      <p:sp>
+        <p:nvSpPr>
+          <p:cNvPr id="22" name="TextBox 21"/>
+          <p:cNvSpPr txBox="1"/>
+          <p:nvPr/>
+        </p:nvSpPr>
+        <p:spPr>
+          <a:xfrm>
+            <a:off x="6699504" y="3392424"/>
+            <a:ext cx="2179320" cy="365760"/>
+          </a:xfrm>
+          <a:prstGeom prst="rect">
+            <a:avLst/>
+          </a:prstGeom>
+          <a:noFill/>
+        </p:spPr>
+        <p:txBody>
+          <a:bodyPr wrap="square" anchor="t" lIns="0" rIns="0" tIns="0" bIns="0">
+            <a:spAutoFit/>
+          </a:bodyPr>
+          <a:lstStyle/>
+          <a:p>
+            <a:pPr algn="l">
+              <a:lnSpc>
+                <a:spcPct val="105000"/>
+              </a:lnSpc>
+            </a:pPr>
+            <a:r>
+              <a:rPr sz="1450" b="1">
+                <a:solidFill>
+                  <a:srgbClr val="1F2A30"/>
+                </a:solidFill>
+                <a:latin typeface="맑은 고딕"/>
+              </a:rPr>
+              <a:t>⚙️ 설정</a:t>
+            </a:r>
+          </a:p>
+        </p:txBody>
+      </p:sp>
+      <p:sp>
+        <p:nvSpPr>
+          <p:cNvPr id="23" name="TextBox 22"/>
+          <p:cNvSpPr txBox="1"/>
+          <p:nvPr/>
+        </p:nvSpPr>
+        <p:spPr>
+          <a:xfrm>
+            <a:off x="6096000" y="3922776"/>
+            <a:ext cx="2590800" cy="822960"/>
+          </a:xfrm>
+          <a:prstGeom prst="rect">
+            <a:avLst/>
+          </a:prstGeom>
+          <a:noFill/>
+        </p:spPr>
+        <p:txBody>
+          <a:bodyPr wrap="square" anchor="t" lIns="0" rIns="0" tIns="0" bIns="0">
+            <a:spAutoFit/>
+          </a:bodyPr>
+          <a:lstStyle/>
+          <a:p>
+            <a:pPr algn="l">
+              <a:lnSpc>
+                <a:spcPct val="110000"/>
+              </a:lnSpc>
+            </a:pPr>
+            <a:r>
+              <a:rPr sz="1150" b="0">
+                <a:solidFill>
+                  <a:srgbClr val="5B6B73"/>
+                </a:solidFill>
+                <a:latin typeface="맑은 고딕"/>
+              </a:rPr>
+              <a:t>이름·보호자·목소리 등록 등</a:t>
+            </a:r>
+          </a:p>
+        </p:txBody>
+      </p:sp>
+      <p:sp>
+        <p:nvSpPr>
+          <p:cNvPr id="24" name="Oval 23"/>
+          <p:cNvSpPr/>
+          <p:nvPr/>
+        </p:nvSpPr>
+        <p:spPr>
+          <a:xfrm>
+            <a:off x="8851392" y="3383280"/>
+            <a:ext cx="457200" cy="457200"/>
+          </a:xfrm>
+          <a:prstGeom prst="ellipse">
+            <a:avLst/>
+          </a:prstGeom>
+          <a:solidFill>
+            <a:srgbClr val="5B6B73"/>
+          </a:solidFill>
+          <a:ln w="25400">
+            <a:solidFill>
+              <a:srgbClr val="FFFFFF"/>
+            </a:solidFill>
+          </a:ln>
+        </p:spPr>
+        <p:style>
+          <a:lnRef idx="1">
+            <a:schemeClr val="accent1"/>
+          </a:lnRef>
+          <a:fillRef idx="3">
+            <a:schemeClr val="accent1"/>
+          </a:fillRef>
+          <a:effectRef idx="2">
+            <a:schemeClr val="accent1"/>
+          </a:effectRef>
+          <a:fontRef idx="minor">
+            <a:schemeClr val="lt1"/>
+          </a:fontRef>
+        </p:style>
+        <p:txBody>
+          <a:bodyPr rtlCol="0" anchor="ctr" wrap="none" lIns="0" rIns="0" tIns="0" bIns="0"/>
+          <a:lstStyle/>
+          <a:p>
+            <a:pPr algn="ctr"/>
+            <a:r>
+              <a:rPr sz="1600" b="1">
+                <a:solidFill>
+                  <a:srgbClr val="FFFFFF"/>
+                </a:solidFill>
+                <a:latin typeface="맑은 고딕"/>
+              </a:rPr>
+              <a:t>4</a:t>
+            </a:r>
+          </a:p>
+        </p:txBody>
+      </p:sp>
+      <p:sp>
+        <p:nvSpPr>
+          <p:cNvPr id="25" name="TextBox 24"/>
+          <p:cNvSpPr txBox="1"/>
+          <p:nvPr/>
+        </p:nvSpPr>
+        <p:spPr>
+          <a:xfrm>
+            <a:off x="9427464" y="3392424"/>
+            <a:ext cx="2179320" cy="365760"/>
+          </a:xfrm>
+          <a:prstGeom prst="rect">
+            <a:avLst/>
+          </a:prstGeom>
+          <a:noFill/>
+        </p:spPr>
+        <p:txBody>
+          <a:bodyPr wrap="square" anchor="t" lIns="0" rIns="0" tIns="0" bIns="0">
+            <a:spAutoFit/>
+          </a:bodyPr>
+          <a:lstStyle/>
+          <a:p>
+            <a:pPr algn="l">
+              <a:lnSpc>
+                <a:spcPct val="105000"/>
+              </a:lnSpc>
+            </a:pPr>
+            <a:r>
+              <a:rPr sz="1450" b="1">
+                <a:solidFill>
+                  <a:srgbClr val="1F2A30"/>
+                </a:solidFill>
+                <a:latin typeface="맑은 고딕"/>
+              </a:rPr>
+              <a:t>↪ 로그아웃</a:t>
+            </a:r>
+          </a:p>
+        </p:txBody>
+      </p:sp>
+      <p:sp>
+        <p:nvSpPr>
+          <p:cNvPr id="26" name="TextBox 25"/>
+          <p:cNvSpPr txBox="1"/>
+          <p:nvPr/>
+        </p:nvSpPr>
+        <p:spPr>
+          <a:xfrm>
+            <a:off x="8823960" y="3922776"/>
+            <a:ext cx="2590800" cy="822960"/>
+          </a:xfrm>
+          <a:prstGeom prst="rect">
+            <a:avLst/>
+          </a:prstGeom>
+          <a:noFill/>
+        </p:spPr>
+        <p:txBody>
+          <a:bodyPr wrap="square" anchor="t" lIns="0" rIns="0" tIns="0" bIns="0">
+            <a:spAutoFit/>
+          </a:bodyPr>
+          <a:lstStyle/>
+          <a:p>
+            <a:pPr algn="l">
+              <a:lnSpc>
+                <a:spcPct val="110000"/>
+              </a:lnSpc>
+            </a:pPr>
+            <a:r>
+              <a:rPr sz="1150" b="0">
+                <a:solidFill>
+                  <a:srgbClr val="5B6B73"/>
+                </a:solidFill>
+                <a:latin typeface="맑은 고딕"/>
+              </a:rPr>
+              <a:t>앱에서 나가기</a:t>
+            </a:r>
+          </a:p>
+        </p:txBody>
+      </p:sp>
+    </p:spTree>
+  </p:cSld>
+  <p:clrMapOvr>
+    <a:masterClrMapping/>
+  </p:clrMapOvr>
+</p:sld>
+</file>
+
+<file path=ppt/slides/slide14.xml><?xml version="1.0" encoding="utf-8"?>
+<p:sld xmlns:a="http://schemas.openxmlformats.org/drawingml/2006/main" xmlns:p="http://schemas.openxmlformats.org/presentationml/2006/main" xmlns:r="http://schemas.openxmlformats.org/officeDocument/2006/relationships">
+  <p:cSld>
+    <p:bg>
+      <p:bgPr>
+        <a:solidFill>
+          <a:srgbClr val="F4F7F7"/>
+        </a:solidFill>
+        <a:effectLst/>
+      </p:bgPr>
+    </p:bg>
+    <p:spTree>
+      <p:nvGrpSpPr>
+        <p:cNvPr id="1" name=""/>
+        <p:cNvGrpSpPr/>
+        <p:nvPr/>
+      </p:nvGrpSpPr>
+      <p:grpSpPr/>
+      <p:sp>
+        <p:nvSpPr>
+          <p:cNvPr id="2" name="Rectangle 1"/>
+          <p:cNvSpPr/>
+          <p:nvPr/>
+        </p:nvSpPr>
+        <p:spPr>
+          <a:xfrm>
+            <a:off x="0" y="0"/>
+            <a:ext cx="12192000" cy="914400"/>
+          </a:xfrm>
+          <a:prstGeom prst="rect">
+            <a:avLst/>
+          </a:prstGeom>
+          <a:solidFill>
+            <a:srgbClr val="0E2A33"/>
+          </a:solidFill>
+          <a:ln>
+            <a:noFill/>
+          </a:ln>
+        </p:spPr>
+        <p:style>
+          <a:lnRef idx="1">
+            <a:schemeClr val="accent1"/>
+          </a:lnRef>
+          <a:fillRef idx="3">
+            <a:schemeClr val="accent1"/>
+          </a:fillRef>
+          <a:effectRef idx="2">
+            <a:schemeClr val="accent1"/>
+          </a:effectRef>
+          <a:fontRef idx="minor">
+            <a:schemeClr val="lt1"/>
+          </a:fontRef>
+        </p:style>
+        <p:txBody>
+          <a:bodyPr rtlCol="0" anchor="ctr"/>
+          <a:lstStyle/>
+          <a:p>
+            <a:pPr algn="ctr"/>
+          </a:p>
+        </p:txBody>
+      </p:sp>
+      <p:sp>
+        <p:nvSpPr>
+          <p:cNvPr id="3" name="Oval 2"/>
+          <p:cNvSpPr/>
+          <p:nvPr/>
+        </p:nvSpPr>
+        <p:spPr>
+          <a:xfrm>
+            <a:off x="411480" y="219456"/>
+            <a:ext cx="502920" cy="502920"/>
+          </a:xfrm>
+          <a:prstGeom prst="ellipse">
+            <a:avLst/>
+          </a:prstGeom>
+          <a:solidFill>
+            <a:srgbClr val="F59E0B"/>
+          </a:solidFill>
+          <a:ln>
+            <a:noFill/>
+          </a:ln>
+        </p:spPr>
+        <p:style>
+          <a:lnRef idx="1">
+            <a:schemeClr val="accent1"/>
+          </a:lnRef>
+          <a:fillRef idx="3">
+            <a:schemeClr val="accent1"/>
+          </a:fillRef>
+          <a:effectRef idx="2">
+            <a:schemeClr val="accent1"/>
+          </a:effectRef>
+          <a:fontRef idx="minor">
+            <a:schemeClr val="lt1"/>
+          </a:fontRef>
+        </p:style>
+        <p:txBody>
+          <a:bodyPr rtlCol="0" anchor="ctr"/>
+          <a:lstStyle/>
+          <a:p>
+            <a:pPr algn="ctr"/>
+          </a:p>
+        </p:txBody>
+      </p:sp>
+      <p:sp>
+        <p:nvSpPr>
+          <p:cNvPr id="4" name="TextBox 3"/>
+          <p:cNvSpPr txBox="1"/>
+          <p:nvPr/>
+        </p:nvSpPr>
+        <p:spPr>
+          <a:xfrm>
+            <a:off x="411480" y="228600"/>
+            <a:ext cx="502920" cy="484632"/>
+          </a:xfrm>
+          <a:prstGeom prst="rect">
+            <a:avLst/>
+          </a:prstGeom>
+          <a:noFill/>
+        </p:spPr>
+        <p:txBody>
+          <a:bodyPr wrap="square" anchor="ctr" lIns="0" rIns="0" tIns="0" bIns="0">
+            <a:spAutoFit/>
+          </a:bodyPr>
+          <a:lstStyle/>
+          <a:p>
+            <a:pPr algn="ctr">
+              <a:lnSpc>
+                <a:spcPct val="105000"/>
+              </a:lnSpc>
+            </a:pPr>
+            <a:r>
+              <a:rPr sz="2000" b="1">
+                <a:solidFill>
+                  <a:srgbClr val="0E2A33"/>
+                </a:solidFill>
+                <a:latin typeface="맑은 고딕"/>
+              </a:rPr>
+              <a:t>＋</a:t>
+            </a:r>
+          </a:p>
+        </p:txBody>
+      </p:sp>
+      <p:sp>
+        <p:nvSpPr>
+          <p:cNvPr id="5" name="TextBox 4"/>
+          <p:cNvSpPr txBox="1"/>
+          <p:nvPr/>
+        </p:nvSpPr>
+        <p:spPr>
+          <a:xfrm>
+            <a:off x="1097280" y="182880"/>
+            <a:ext cx="10363200" cy="548640"/>
+          </a:xfrm>
+          <a:prstGeom prst="rect">
+            <a:avLst/>
+          </a:prstGeom>
+          <a:noFill/>
+        </p:spPr>
+        <p:txBody>
+          <a:bodyPr wrap="square" anchor="ctr" lIns="0" rIns="0" tIns="0" bIns="0">
+            <a:spAutoFit/>
+          </a:bodyPr>
+          <a:lstStyle/>
+          <a:p>
+            <a:pPr algn="l">
+              <a:lnSpc>
+                <a:spcPct val="105000"/>
+              </a:lnSpc>
+            </a:pPr>
+            <a:r>
+              <a:rPr sz="2400" b="1">
+                <a:solidFill>
+                  <a:srgbClr val="FFFFFF"/>
+                </a:solidFill>
+                <a:latin typeface="맑은 고딕"/>
+              </a:rPr>
+              <a:t>내 목소리 등록하기</a:t>
+            </a:r>
+          </a:p>
+        </p:txBody>
+      </p:sp>
+      <p:sp>
+        <p:nvSpPr>
+          <p:cNvPr id="6" name="TextBox 5"/>
+          <p:cNvSpPr txBox="1"/>
+          <p:nvPr/>
+        </p:nvSpPr>
+        <p:spPr>
+          <a:xfrm>
+            <a:off x="548640" y="1051560"/>
+            <a:ext cx="11094720" cy="457200"/>
+          </a:xfrm>
+          <a:prstGeom prst="rect">
+            <a:avLst/>
+          </a:prstGeom>
+          <a:noFill/>
+        </p:spPr>
+        <p:txBody>
+          <a:bodyPr wrap="square" anchor="t" lIns="0" rIns="0" tIns="0" bIns="0">
+            <a:spAutoFit/>
+          </a:bodyPr>
+          <a:lstStyle/>
+          <a:p>
+            <a:pPr algn="l">
+              <a:lnSpc>
+                <a:spcPct val="105000"/>
+              </a:lnSpc>
+            </a:pPr>
+            <a:r>
+              <a:rPr sz="1450" b="0">
+                <a:solidFill>
+                  <a:srgbClr val="5B6B73"/>
+                </a:solidFill>
+                <a:latin typeface="맑은 고딕"/>
+              </a:rPr>
+              <a:t>‘상시 감시’를 쓰려면 먼저 목소리를 등록해요. 지문 등록처럼, 한 번 해두면 내 목소리를 알아봅니다.</a:t>
+            </a:r>
+          </a:p>
+        </p:txBody>
+      </p:sp>
+      <p:pic>
+        <p:nvPicPr>
+          <p:cNvPr id="7" name="Picture 6" descr="guide-03-mypage.png"/>
+          <p:cNvPicPr>
+            <a:picLocks noChangeAspect="1"/>
+          </p:cNvPicPr>
+          <p:nvPr/>
+        </p:nvPicPr>
+        <p:blipFill>
+          <a:blip r:embed="rId2"/>
+          <a:stretch>
+            <a:fillRect/>
+          </a:stretch>
+        </p:blipFill>
+        <p:spPr>
+          <a:xfrm>
+            <a:off x="640080" y="1600200"/>
+            <a:ext cx="2011680" cy="4353481"/>
+          </a:xfrm>
+          <a:prstGeom prst="rect">
+            <a:avLst/>
+          </a:prstGeom>
+          <a:ln w="12700">
+            <a:solidFill>
+              <a:srgbClr val="D0D5D8"/>
+            </a:solidFill>
+          </a:ln>
+        </p:spPr>
+      </p:pic>
+      <p:sp>
+        <p:nvSpPr>
+          <p:cNvPr id="8" name="Rounded Rectangle 7"/>
+          <p:cNvSpPr/>
+          <p:nvPr/>
+        </p:nvSpPr>
+        <p:spPr>
+          <a:xfrm>
+            <a:off x="694944" y="3232755"/>
+            <a:ext cx="1901952" cy="217674"/>
+          </a:xfrm>
+          <a:prstGeom prst="roundRect">
+            <a:avLst/>
+          </a:prstGeom>
+          <a:noFill/>
+          <a:ln w="38100">
+            <a:solidFill>
+              <a:srgbClr val="F59E0B"/>
+            </a:solidFill>
+          </a:ln>
+        </p:spPr>
+        <p:style>
+          <a:lnRef idx="1">
+            <a:schemeClr val="accent1"/>
+          </a:lnRef>
+          <a:fillRef idx="3">
+            <a:schemeClr val="accent1"/>
+          </a:fillRef>
+          <a:effectRef idx="2">
+            <a:schemeClr val="accent1"/>
+          </a:effectRef>
+          <a:fontRef idx="minor">
+            <a:schemeClr val="lt1"/>
+          </a:fontRef>
+        </p:style>
+        <p:txBody>
+          <a:bodyPr rtlCol="0" anchor="ctr"/>
+          <a:lstStyle/>
+          <a:p>
+            <a:pPr algn="ctr"/>
+          </a:p>
+        </p:txBody>
+      </p:sp>
+      <p:sp>
+        <p:nvSpPr>
+          <p:cNvPr id="9" name="Oval 8"/>
+          <p:cNvSpPr/>
+          <p:nvPr/>
+        </p:nvSpPr>
+        <p:spPr>
+          <a:xfrm>
+            <a:off x="2478024" y="3149568"/>
+            <a:ext cx="384048" cy="384048"/>
+          </a:xfrm>
+          <a:prstGeom prst="ellipse">
+            <a:avLst/>
+          </a:prstGeom>
+          <a:solidFill>
+            <a:srgbClr val="F59E0B"/>
+          </a:solidFill>
+          <a:ln w="25400">
+            <a:solidFill>
+              <a:srgbClr val="FFFFFF"/>
+            </a:solidFill>
+          </a:ln>
+        </p:spPr>
+        <p:style>
+          <a:lnRef idx="1">
+            <a:schemeClr val="accent1"/>
+          </a:lnRef>
+          <a:fillRef idx="3">
+            <a:schemeClr val="accent1"/>
+          </a:fillRef>
+          <a:effectRef idx="2">
+            <a:schemeClr val="accent1"/>
+          </a:effectRef>
+          <a:fontRef idx="minor">
+            <a:schemeClr val="lt1"/>
+          </a:fontRef>
+        </p:style>
+        <p:txBody>
+          <a:bodyPr rtlCol="0" anchor="ctr" wrap="none" lIns="0" rIns="0" tIns="0" bIns="0"/>
+          <a:lstStyle/>
+          <a:p>
+            <a:pPr algn="ctr"/>
+            <a:r>
+              <a:rPr sz="1600" b="1">
+                <a:solidFill>
+                  <a:srgbClr val="FFFFFF"/>
+                </a:solidFill>
+                <a:latin typeface="맑은 고딕"/>
+              </a:rPr>
+              <a:t>1</a:t>
+            </a:r>
+          </a:p>
+        </p:txBody>
+      </p:sp>
+      <p:pic>
+        <p:nvPicPr>
+          <p:cNvPr id="10" name="Picture 9" descr="guide-04-voiceprint.png"/>
+          <p:cNvPicPr>
+            <a:picLocks noChangeAspect="1"/>
+          </p:cNvPicPr>
+          <p:nvPr/>
+        </p:nvPicPr>
+        <p:blipFill>
+          <a:blip r:embed="rId3"/>
+          <a:stretch>
+            <a:fillRect/>
+          </a:stretch>
+        </p:blipFill>
+        <p:spPr>
+          <a:xfrm>
+            <a:off x="3200400" y="1600200"/>
+            <a:ext cx="2011680" cy="4549079"/>
+          </a:xfrm>
+          <a:prstGeom prst="rect">
+            <a:avLst/>
+          </a:prstGeom>
+          <a:ln w="12700">
+            <a:solidFill>
+              <a:srgbClr val="D0D5D8"/>
+            </a:solidFill>
+          </a:ln>
+        </p:spPr>
+      </p:pic>
+      <p:sp>
+        <p:nvSpPr>
+          <p:cNvPr id="11" name="Rounded Rectangle 10"/>
+          <p:cNvSpPr/>
+          <p:nvPr/>
+        </p:nvSpPr>
+        <p:spPr>
+          <a:xfrm>
+            <a:off x="3255264" y="2578251"/>
+            <a:ext cx="1901952" cy="386671"/>
+          </a:xfrm>
+          <a:prstGeom prst="roundRect">
+            <a:avLst/>
+          </a:prstGeom>
+          <a:noFill/>
+          <a:ln w="38100">
+            <a:solidFill>
+              <a:srgbClr val="028090"/>
+            </a:solidFill>
+          </a:ln>
+        </p:spPr>
+        <p:style>
+          <a:lnRef idx="1">
+            <a:schemeClr val="accent1"/>
+          </a:lnRef>
+          <a:fillRef idx="3">
+            <a:schemeClr val="accent1"/>
+          </a:fillRef>
+          <a:effectRef idx="2">
+            <a:schemeClr val="accent1"/>
+          </a:effectRef>
+          <a:fontRef idx="minor">
+            <a:schemeClr val="lt1"/>
+          </a:fontRef>
+        </p:style>
+        <p:txBody>
+          <a:bodyPr rtlCol="0" anchor="ctr"/>
+          <a:lstStyle/>
+          <a:p>
+            <a:pPr algn="ctr"/>
+          </a:p>
+        </p:txBody>
+      </p:sp>
+      <p:sp>
+        <p:nvSpPr>
+          <p:cNvPr id="12" name="Oval 11"/>
+          <p:cNvSpPr/>
+          <p:nvPr/>
+        </p:nvSpPr>
+        <p:spPr>
+          <a:xfrm>
+            <a:off x="5038344" y="2568191"/>
+            <a:ext cx="384048" cy="384048"/>
+          </a:xfrm>
+          <a:prstGeom prst="ellipse">
+            <a:avLst/>
+          </a:prstGeom>
+          <a:solidFill>
+            <a:srgbClr val="028090"/>
+          </a:solidFill>
+          <a:ln w="25400">
+            <a:solidFill>
+              <a:srgbClr val="FFFFFF"/>
+            </a:solidFill>
+          </a:ln>
+        </p:spPr>
+        <p:style>
+          <a:lnRef idx="1">
+            <a:schemeClr val="accent1"/>
+          </a:lnRef>
+          <a:fillRef idx="3">
+            <a:schemeClr val="accent1"/>
+          </a:fillRef>
+          <a:effectRef idx="2">
+            <a:schemeClr val="accent1"/>
+          </a:effectRef>
+          <a:fontRef idx="minor">
+            <a:schemeClr val="lt1"/>
+          </a:fontRef>
+        </p:style>
+        <p:txBody>
+          <a:bodyPr rtlCol="0" anchor="ctr" wrap="none" lIns="0" rIns="0" tIns="0" bIns="0"/>
+          <a:lstStyle/>
+          <a:p>
+            <a:pPr algn="ctr"/>
+            <a:r>
+              <a:rPr sz="1600" b="1">
+                <a:solidFill>
+                  <a:srgbClr val="FFFFFF"/>
+                </a:solidFill>
+                <a:latin typeface="맑은 고딕"/>
+              </a:rPr>
+              <a:t>2</a:t>
+            </a:r>
+          </a:p>
+        </p:txBody>
+      </p:sp>
+      <p:sp>
+        <p:nvSpPr>
+          <p:cNvPr id="13" name="Rounded Rectangle 12"/>
+          <p:cNvSpPr/>
+          <p:nvPr/>
+        </p:nvSpPr>
+        <p:spPr>
+          <a:xfrm>
+            <a:off x="3255264" y="3647285"/>
+            <a:ext cx="1901952" cy="282042"/>
+          </a:xfrm>
+          <a:prstGeom prst="roundRect">
+            <a:avLst/>
+          </a:prstGeom>
+          <a:noFill/>
+          <a:ln w="38100">
+            <a:solidFill>
+              <a:srgbClr val="00A896"/>
+            </a:solidFill>
+          </a:ln>
+        </p:spPr>
+        <p:style>
+          <a:lnRef idx="1">
+            <a:schemeClr val="accent1"/>
+          </a:lnRef>
+          <a:fillRef idx="3">
+            <a:schemeClr val="accent1"/>
+          </a:fillRef>
+          <a:effectRef idx="2">
+            <a:schemeClr val="accent1"/>
+          </a:effectRef>
+          <a:fontRef idx="minor">
+            <a:schemeClr val="lt1"/>
+          </a:fontRef>
+        </p:style>
+        <p:txBody>
+          <a:bodyPr rtlCol="0" anchor="ctr"/>
+          <a:lstStyle/>
+          <a:p>
+            <a:pPr algn="ctr"/>
+          </a:p>
+        </p:txBody>
+      </p:sp>
+      <p:sp>
+        <p:nvSpPr>
+          <p:cNvPr id="14" name="Oval 13"/>
+          <p:cNvSpPr/>
+          <p:nvPr/>
+        </p:nvSpPr>
+        <p:spPr>
+          <a:xfrm>
+            <a:off x="5038344" y="3591733"/>
+            <a:ext cx="384048" cy="384048"/>
+          </a:xfrm>
+          <a:prstGeom prst="ellipse">
+            <a:avLst/>
+          </a:prstGeom>
+          <a:solidFill>
+            <a:srgbClr val="00A896"/>
+          </a:solidFill>
+          <a:ln w="25400">
+            <a:solidFill>
+              <a:srgbClr val="FFFFFF"/>
+            </a:solidFill>
+          </a:ln>
+        </p:spPr>
+        <p:style>
+          <a:lnRef idx="1">
+            <a:schemeClr val="accent1"/>
+          </a:lnRef>
+          <a:fillRef idx="3">
+            <a:schemeClr val="accent1"/>
+          </a:fillRef>
+          <a:effectRef idx="2">
+            <a:schemeClr val="accent1"/>
+          </a:effectRef>
+          <a:fontRef idx="minor">
+            <a:schemeClr val="lt1"/>
+          </a:fontRef>
+        </p:style>
+        <p:txBody>
+          <a:bodyPr rtlCol="0" anchor="ctr" wrap="none" lIns="0" rIns="0" tIns="0" bIns="0"/>
+          <a:lstStyle/>
+          <a:p>
+            <a:pPr algn="ctr"/>
+            <a:r>
+              <a:rPr sz="1600" b="1">
+                <a:solidFill>
+                  <a:srgbClr val="FFFFFF"/>
+                </a:solidFill>
+                <a:latin typeface="맑은 고딕"/>
+              </a:rPr>
+              <a:t>3</a:t>
+            </a:r>
+          </a:p>
+        </p:txBody>
+      </p:sp>
+      <p:sp>
+        <p:nvSpPr>
+          <p:cNvPr id="15" name="Oval 14"/>
+          <p:cNvSpPr/>
+          <p:nvPr/>
+        </p:nvSpPr>
+        <p:spPr>
+          <a:xfrm>
+            <a:off x="5696712" y="1673352"/>
+            <a:ext cx="457200" cy="457200"/>
+          </a:xfrm>
+          <a:prstGeom prst="ellipse">
+            <a:avLst/>
+          </a:prstGeom>
+          <a:solidFill>
+            <a:srgbClr val="F59E0B"/>
+          </a:solidFill>
+          <a:ln w="25400">
+            <a:solidFill>
+              <a:srgbClr val="FFFFFF"/>
+            </a:solidFill>
+          </a:ln>
+        </p:spPr>
+        <p:style>
+          <a:lnRef idx="1">
+            <a:schemeClr val="accent1"/>
+          </a:lnRef>
+          <a:fillRef idx="3">
+            <a:schemeClr val="accent1"/>
+          </a:fillRef>
+          <a:effectRef idx="2">
+            <a:schemeClr val="accent1"/>
+          </a:effectRef>
+          <a:fontRef idx="minor">
+            <a:schemeClr val="lt1"/>
+          </a:fontRef>
+        </p:style>
+        <p:txBody>
+          <a:bodyPr rtlCol="0" anchor="ctr" wrap="none" lIns="0" rIns="0" tIns="0" bIns="0"/>
+          <a:lstStyle/>
+          <a:p>
+            <a:pPr algn="ctr"/>
+            <a:r>
+              <a:rPr sz="1600" b="1">
+                <a:solidFill>
+                  <a:srgbClr val="FFFFFF"/>
+                </a:solidFill>
+                <a:latin typeface="맑은 고딕"/>
+              </a:rPr>
+              <a:t>1</a:t>
+            </a:r>
+          </a:p>
+        </p:txBody>
+      </p:sp>
+      <p:sp>
+        <p:nvSpPr>
+          <p:cNvPr id="16" name="TextBox 15"/>
+          <p:cNvSpPr txBox="1"/>
+          <p:nvPr/>
+        </p:nvSpPr>
+        <p:spPr>
+          <a:xfrm>
+            <a:off x="6327648" y="1664208"/>
+            <a:ext cx="5425440" cy="365760"/>
+          </a:xfrm>
+          <a:prstGeom prst="rect">
+            <a:avLst/>
+          </a:prstGeom>
+          <a:noFill/>
+        </p:spPr>
+        <p:txBody>
+          <a:bodyPr wrap="square" anchor="t" lIns="0" rIns="0" tIns="0" bIns="0">
+            <a:spAutoFit/>
+          </a:bodyPr>
+          <a:lstStyle/>
+          <a:p>
+            <a:pPr algn="l">
+              <a:lnSpc>
+                <a:spcPct val="105000"/>
+              </a:lnSpc>
+            </a:pPr>
+            <a:r>
+              <a:rPr sz="1600" b="1">
+                <a:solidFill>
+                  <a:srgbClr val="1F2A30"/>
+                </a:solidFill>
+                <a:latin typeface="맑은 고딕"/>
+              </a:rPr>
+              <a:t>마이페이지 → 목소리 등록·확인</a:t>
+            </a:r>
+          </a:p>
+        </p:txBody>
+      </p:sp>
+      <p:sp>
+        <p:nvSpPr>
+          <p:cNvPr id="17" name="TextBox 16"/>
+          <p:cNvSpPr txBox="1"/>
+          <p:nvPr/>
+        </p:nvSpPr>
+        <p:spPr>
+          <a:xfrm>
+            <a:off x="6327648" y="2011680"/>
+            <a:ext cx="5425440" cy="548640"/>
+          </a:xfrm>
+          <a:prstGeom prst="rect">
+            <a:avLst/>
+          </a:prstGeom>
+          <a:noFill/>
+        </p:spPr>
+        <p:txBody>
+          <a:bodyPr wrap="square" anchor="t" lIns="0" rIns="0" tIns="0" bIns="0">
+            <a:spAutoFit/>
+          </a:bodyPr>
+          <a:lstStyle/>
+          <a:p>
+            <a:pPr algn="l">
+              <a:lnSpc>
+                <a:spcPct val="105000"/>
+              </a:lnSpc>
+            </a:pPr>
+            <a:r>
+              <a:rPr sz="1250" b="0">
+                <a:solidFill>
+                  <a:srgbClr val="5B6B73"/>
+                </a:solidFill>
+                <a:latin typeface="맑은 고딕"/>
+              </a:rPr>
+              <a:t>설정(⚙️)에 들어가 노란 [목소리 등록·확인] 단추를 누르세요.</a:t>
+            </a:r>
+          </a:p>
+        </p:txBody>
+      </p:sp>
+      <p:sp>
+        <p:nvSpPr>
+          <p:cNvPr id="18" name="Oval 17"/>
+          <p:cNvSpPr/>
+          <p:nvPr/>
+        </p:nvSpPr>
+        <p:spPr>
+          <a:xfrm>
+            <a:off x="5696712" y="2606040"/>
+            <a:ext cx="457200" cy="457200"/>
+          </a:xfrm>
+          <a:prstGeom prst="ellipse">
+            <a:avLst/>
+          </a:prstGeom>
+          <a:solidFill>
+            <a:srgbClr val="028090"/>
+          </a:solidFill>
+          <a:ln w="25400">
+            <a:solidFill>
+              <a:srgbClr val="FFFFFF"/>
+            </a:solidFill>
+          </a:ln>
+        </p:spPr>
+        <p:style>
+          <a:lnRef idx="1">
+            <a:schemeClr val="accent1"/>
+          </a:lnRef>
+          <a:fillRef idx="3">
+            <a:schemeClr val="accent1"/>
+          </a:fillRef>
+          <a:effectRef idx="2">
+            <a:schemeClr val="accent1"/>
+          </a:effectRef>
+          <a:fontRef idx="minor">
+            <a:schemeClr val="lt1"/>
+          </a:fontRef>
+        </p:style>
+        <p:txBody>
+          <a:bodyPr rtlCol="0" anchor="ctr" wrap="none" lIns="0" rIns="0" tIns="0" bIns="0"/>
+          <a:lstStyle/>
+          <a:p>
+            <a:pPr algn="ctr"/>
+            <a:r>
+              <a:rPr sz="1600" b="1">
+                <a:solidFill>
+                  <a:srgbClr val="FFFFFF"/>
+                </a:solidFill>
+                <a:latin typeface="맑은 고딕"/>
+              </a:rPr>
+              <a:t>2</a:t>
+            </a:r>
+          </a:p>
+        </p:txBody>
+      </p:sp>
+      <p:sp>
+        <p:nvSpPr>
+          <p:cNvPr id="19" name="TextBox 18"/>
+          <p:cNvSpPr txBox="1"/>
+          <p:nvPr/>
+        </p:nvSpPr>
+        <p:spPr>
+          <a:xfrm>
+            <a:off x="6327648" y="2596896"/>
+            <a:ext cx="5425440" cy="365760"/>
+          </a:xfrm>
+          <a:prstGeom prst="rect">
+            <a:avLst/>
+          </a:prstGeom>
+          <a:noFill/>
+        </p:spPr>
+        <p:txBody>
+          <a:bodyPr wrap="square" anchor="t" lIns="0" rIns="0" tIns="0" bIns="0">
+            <a:spAutoFit/>
+          </a:bodyPr>
+          <a:lstStyle/>
+          <a:p>
+            <a:pPr algn="l">
+              <a:lnSpc>
+                <a:spcPct val="105000"/>
+              </a:lnSpc>
+            </a:pPr>
+            <a:r>
+              <a:rPr sz="1600" b="1">
+                <a:solidFill>
+                  <a:srgbClr val="1F2A30"/>
+                </a:solidFill>
+                <a:latin typeface="맑은 고딕"/>
+              </a:rPr>
+              <a:t>화면의 문장을 30초 읽기</a:t>
+            </a:r>
+          </a:p>
+        </p:txBody>
+      </p:sp>
+      <p:sp>
+        <p:nvSpPr>
+          <p:cNvPr id="20" name="TextBox 19"/>
+          <p:cNvSpPr txBox="1"/>
+          <p:nvPr/>
+        </p:nvSpPr>
+        <p:spPr>
+          <a:xfrm>
+            <a:off x="6327648" y="2944368"/>
+            <a:ext cx="5425440" cy="548640"/>
+          </a:xfrm>
+          <a:prstGeom prst="rect">
+            <a:avLst/>
+          </a:prstGeom>
+          <a:noFill/>
+        </p:spPr>
+        <p:txBody>
+          <a:bodyPr wrap="square" anchor="t" lIns="0" rIns="0" tIns="0" bIns="0">
+            <a:spAutoFit/>
+          </a:bodyPr>
+          <a:lstStyle/>
+          <a:p>
+            <a:pPr algn="l">
+              <a:lnSpc>
+                <a:spcPct val="105000"/>
+              </a:lnSpc>
+            </a:pPr>
+            <a:r>
+              <a:rPr sz="1250" b="0">
+                <a:solidFill>
+                  <a:srgbClr val="5B6B73"/>
+                </a:solidFill>
+                <a:latin typeface="맑은 고딕"/>
+              </a:rPr>
+              <a:t>떠 있는 문장을 편하게 소리 내어 읽으면, 내 목소리 특징을 익혀요.</a:t>
+            </a:r>
+          </a:p>
+        </p:txBody>
+      </p:sp>
+      <p:sp>
+        <p:nvSpPr>
+          <p:cNvPr id="21" name="Oval 20"/>
+          <p:cNvSpPr/>
+          <p:nvPr/>
+        </p:nvSpPr>
+        <p:spPr>
+          <a:xfrm>
+            <a:off x="5696712" y="3538728"/>
+            <a:ext cx="457200" cy="457200"/>
+          </a:xfrm>
+          <a:prstGeom prst="ellipse">
+            <a:avLst/>
+          </a:prstGeom>
+          <a:solidFill>
+            <a:srgbClr val="00A896"/>
+          </a:solidFill>
+          <a:ln w="25400">
+            <a:solidFill>
+              <a:srgbClr val="FFFFFF"/>
+            </a:solidFill>
+          </a:ln>
+        </p:spPr>
+        <p:style>
+          <a:lnRef idx="1">
+            <a:schemeClr val="accent1"/>
+          </a:lnRef>
+          <a:fillRef idx="3">
+            <a:schemeClr val="accent1"/>
+          </a:fillRef>
+          <a:effectRef idx="2">
+            <a:schemeClr val="accent1"/>
+          </a:effectRef>
+          <a:fontRef idx="minor">
+            <a:schemeClr val="lt1"/>
+          </a:fontRef>
+        </p:style>
+        <p:txBody>
+          <a:bodyPr rtlCol="0" anchor="ctr" wrap="none" lIns="0" rIns="0" tIns="0" bIns="0"/>
+          <a:lstStyle/>
+          <a:p>
+            <a:pPr algn="ctr"/>
+            <a:r>
+              <a:rPr sz="1600" b="1">
+                <a:solidFill>
+                  <a:srgbClr val="FFFFFF"/>
+                </a:solidFill>
+                <a:latin typeface="맑은 고딕"/>
+              </a:rPr>
+              <a:t>3</a:t>
+            </a:r>
+          </a:p>
+        </p:txBody>
+      </p:sp>
+      <p:sp>
+        <p:nvSpPr>
+          <p:cNvPr id="22" name="TextBox 21"/>
+          <p:cNvSpPr txBox="1"/>
+          <p:nvPr/>
+        </p:nvSpPr>
+        <p:spPr>
+          <a:xfrm>
+            <a:off x="6327648" y="3529584"/>
+            <a:ext cx="5425440" cy="365760"/>
+          </a:xfrm>
+          <a:prstGeom prst="rect">
+            <a:avLst/>
+          </a:prstGeom>
+          <a:noFill/>
+        </p:spPr>
+        <p:txBody>
+          <a:bodyPr wrap="square" anchor="t" lIns="0" rIns="0" tIns="0" bIns="0">
+            <a:spAutoFit/>
+          </a:bodyPr>
+          <a:lstStyle/>
+          <a:p>
+            <a:pPr algn="l">
+              <a:lnSpc>
+                <a:spcPct val="105000"/>
+              </a:lnSpc>
+            </a:pPr>
+            <a:r>
+              <a:rPr sz="1600" b="1">
+                <a:solidFill>
+                  <a:srgbClr val="1F2A30"/>
+                </a:solidFill>
+                <a:latin typeface="맑은 고딕"/>
+              </a:rPr>
+              <a:t>[등록 시작] 누르고 녹음</a:t>
+            </a:r>
+          </a:p>
+        </p:txBody>
+      </p:sp>
+      <p:sp>
+        <p:nvSpPr>
+          <p:cNvPr id="23" name="TextBox 22"/>
+          <p:cNvSpPr txBox="1"/>
+          <p:nvPr/>
+        </p:nvSpPr>
+        <p:spPr>
+          <a:xfrm>
+            <a:off x="6327648" y="3877056"/>
+            <a:ext cx="5425440" cy="548640"/>
+          </a:xfrm>
+          <a:prstGeom prst="rect">
+            <a:avLst/>
+          </a:prstGeom>
+          <a:noFill/>
+        </p:spPr>
+        <p:txBody>
+          <a:bodyPr wrap="square" anchor="t" lIns="0" rIns="0" tIns="0" bIns="0">
+            <a:spAutoFit/>
+          </a:bodyPr>
+          <a:lstStyle/>
+          <a:p>
+            <a:pPr algn="l">
+              <a:lnSpc>
+                <a:spcPct val="105000"/>
+              </a:lnSpc>
+            </a:pPr>
+            <a:r>
+              <a:rPr sz="1250" b="0">
+                <a:solidFill>
+                  <a:srgbClr val="5B6B73"/>
+                </a:solidFill>
+                <a:latin typeface="맑은 고딕"/>
+              </a:rPr>
+              <a:t>녹음이 끝나면 자동 저장. 한 번이면 충분하고, 조용한 곳에서 하면 더 정확해요.</a:t>
+            </a:r>
+          </a:p>
+        </p:txBody>
+      </p:sp>
+      <p:sp>
+        <p:nvSpPr>
+          <p:cNvPr id="24" name="Rounded Rectangle 23"/>
+          <p:cNvSpPr/>
+          <p:nvPr/>
+        </p:nvSpPr>
+        <p:spPr>
+          <a:xfrm>
+            <a:off x="5669280" y="4572000"/>
+            <a:ext cx="5974080" cy="960120"/>
+          </a:xfrm>
+          <a:prstGeom prst="roundRect">
+            <a:avLst/>
+          </a:prstGeom>
+          <a:solidFill>
+            <a:srgbClr val="E7F3F4"/>
+          </a:solidFill>
+          <a:ln w="15240">
+            <a:solidFill>
+              <a:srgbClr val="00A896"/>
+            </a:solidFill>
+          </a:ln>
+        </p:spPr>
+        <p:style>
+          <a:lnRef idx="1">
+            <a:schemeClr val="accent1"/>
+          </a:lnRef>
+          <a:fillRef idx="3">
+            <a:schemeClr val="accent1"/>
+          </a:fillRef>
+          <a:effectRef idx="2">
+            <a:schemeClr val="accent1"/>
+          </a:effectRef>
+          <a:fontRef idx="minor">
+            <a:schemeClr val="lt1"/>
+          </a:fontRef>
+        </p:style>
+        <p:txBody>
+          <a:bodyPr rtlCol="0" anchor="ctr"/>
+          <a:lstStyle/>
+          <a:p>
+            <a:pPr algn="ctr"/>
+          </a:p>
+        </p:txBody>
+      </p:sp>
+      <p:sp>
+        <p:nvSpPr>
+          <p:cNvPr id="25" name="TextBox 24"/>
+          <p:cNvSpPr txBox="1"/>
+          <p:nvPr/>
+        </p:nvSpPr>
+        <p:spPr>
+          <a:xfrm>
+            <a:off x="5943600" y="4718304"/>
+            <a:ext cx="5516880" cy="731520"/>
+          </a:xfrm>
+          <a:prstGeom prst="rect">
+            <a:avLst/>
+          </a:prstGeom>
+          <a:noFill/>
+        </p:spPr>
+        <p:txBody>
+          <a:bodyPr wrap="square" anchor="ctr" lIns="0" rIns="0" tIns="0" bIns="0">
+            <a:spAutoFit/>
+          </a:bodyPr>
+          <a:lstStyle/>
+          <a:p>
+            <a:pPr algn="l">
+              <a:lnSpc>
+                <a:spcPct val="120000"/>
+              </a:lnSpc>
+            </a:pPr>
+            <a:r>
+              <a:rPr sz="1300" b="0">
+                <a:solidFill>
+                  <a:srgbClr val="1F2A30"/>
+                </a:solidFill>
+                <a:latin typeface="맑은 고딕"/>
+              </a:rPr>
+              <a:t>🔒 목소리 원본은 휴대폰을 벗어나지 않아요.</a:t>
+            </a:r>
+          </a:p>
+          <a:p>
+            <a:pPr algn="l">
+              <a:lnSpc>
+                <a:spcPct val="120000"/>
+              </a:lnSpc>
+            </a:pPr>
+            <a:r>
+              <a:rPr sz="1300" b="0">
+                <a:solidFill>
+                  <a:srgbClr val="1F2A30"/>
+                </a:solidFill>
+                <a:latin typeface="맑은 고딕"/>
+              </a:rPr>
+              <a:t>분석한 특징값만 안전하게 저장됩니다.</a:t>
+            </a:r>
+          </a:p>
+        </p:txBody>
+      </p:sp>
+    </p:spTree>
+  </p:cSld>
+  <p:clrMapOvr>
+    <a:masterClrMapping/>
+  </p:clrMapOvr>
+</p:sld>
+</file>
+
 <file path=ppt/slides/slide2.xml><?xml version="1.0" encoding="utf-8"?>
 <p:sld xmlns:a="http://schemas.openxmlformats.org/drawingml/2006/main" xmlns:r="http://schemas.openxmlformats.org/officeDocument/2006/relationships" xmlns:p="http://schemas.openxmlformats.org/presentationml/2006/main">
   <p:cSld name="Slide 2">
